--- a/FY27 Tagging and Tracking Training Deck.pptx
+++ b/FY27 Tagging and Tracking Training Deck.pptx
@@ -25,6 +25,11 @@
     <p:sldId id="273" r:id="rId24"/>
     <p:sldId id="274" r:id="rId25"/>
     <p:sldId id="275" r:id="rId26"/>
+    <p:sldId id="276" r:id="rId27"/>
+    <p:sldId id="277" r:id="rId28"/>
+    <p:sldId id="278" r:id="rId29"/>
+    <p:sldId id="279" r:id="rId30"/>
+    <p:sldId id="280" r:id="rId31"/>
   </p:sldIdLst>
   <p:sldSz cx="12191695" cy="6858000" type="screen4x3"/>
   <p:notesSz cx="6858000" cy="9144000"/>
@@ -3491,7 +3496,7 @@
               </a:defRPr>
             </a:pPr>
             <a:r>
-              <a:t>Global tagging rules</a:t>
+              <a:t>Current-state URL anatomy</a:t>
             </a:r>
           </a:p>
         </p:txBody>
@@ -3522,6 +3527,21 @@
               <a:spcAft>
                 <a:spcPts val="300"/>
               </a:spcAft>
+              <a:defRPr sz="1500" b="1">
+                <a:solidFill>
+                  <a:srgbClr val="005596"/>
+                </a:solidFill>
+              </a:defRPr>
+            </a:pPr>
+            <a:r>
+              <a:t>Every standard tracking URL must include:</a:t>
+            </a:r>
+          </a:p>
+          <a:p>
+            <a:pPr>
+              <a:spcAft>
+                <a:spcPts val="300"/>
+              </a:spcAft>
               <a:defRPr sz="1500">
                 <a:solidFill>
                   <a:srgbClr val="1F2937"/>
@@ -3529,7 +3549,7 @@
               </a:defRPr>
             </a:pPr>
             <a:r>
-              <a:t>All UTM values must be lowercase.</a:t>
+              <a:t>ccid</a:t>
             </a:r>
           </a:p>
           <a:p>
@@ -3544,7 +3564,7 @@
               </a:defRPr>
             </a:pPr>
             <a:r>
-              <a:t>Use hyphens instead of spaces.</a:t>
+              <a:t>dtid</a:t>
             </a:r>
           </a:p>
           <a:p>
@@ -3559,7 +3579,7 @@
               </a:defRPr>
             </a:pPr>
             <a:r>
-              <a:t>Omit empty parameters entirely.</a:t>
+              <a:t>utm_id</a:t>
             </a:r>
           </a:p>
           <a:p>
@@ -3574,7 +3594,7 @@
               </a:defRPr>
             </a:pPr>
             <a:r>
-              <a:t>utm_id must always match ccid.</a:t>
+              <a:t>utm_medium</a:t>
             </a:r>
           </a:p>
           <a:p>
@@ -3589,7 +3609,22 @@
               </a:defRPr>
             </a:pPr>
             <a:r>
-              <a:t>No spaces or special characters (&amp;, %, ?, =) in values.</a:t>
+              <a:t>utm_source</a:t>
+            </a:r>
+          </a:p>
+          <a:p>
+            <a:pPr>
+              <a:spcAft>
+                <a:spcPts val="300"/>
+              </a:spcAft>
+              <a:defRPr sz="1500" b="1">
+                <a:solidFill>
+                  <a:srgbClr val="005596"/>
+                </a:solidFill>
+              </a:defRPr>
+            </a:pPr>
+            <a:r>
+              <a:t>Conditional:</a:t>
             </a:r>
           </a:p>
           <a:p>
@@ -3604,22 +3639,7 @@
               </a:defRPr>
             </a:pPr>
             <a:r>
-              <a:t>Use approved values; do not create local variants.</a:t>
-            </a:r>
-          </a:p>
-          <a:p>
-            <a:pPr>
-              <a:spcAft>
-                <a:spcPts val="300"/>
-              </a:spcAft>
-              <a:defRPr sz="1500" b="1">
-                <a:solidFill>
-                  <a:srgbClr val="005596"/>
-                </a:solidFill>
-              </a:defRPr>
-            </a:pPr>
-            <a:r>
-              <a:t>Examples:</a:t>
+              <a:t>utm_creative is required only for Paid Direct, Paid Programmatic, and Paid Social.</a:t>
             </a:r>
           </a:p>
           <a:p>
@@ -3634,22 +3654,7 @@
               </a:defRPr>
             </a:pPr>
             <a:r>
-              <a:t>Correct: paid-social, technologyadvice, security-info-watch</a:t>
-            </a:r>
-          </a:p>
-          <a:p>
-            <a:pPr>
-              <a:spcAft>
-                <a:spcPts val="300"/>
-              </a:spcAft>
-              <a:defRPr sz="1500">
-                <a:solidFill>
-                  <a:srgbClr val="1F2937"/>
-                </a:solidFill>
-              </a:defRPr>
-            </a:pPr>
-            <a:r>
-              <a:t>Incorrect: Paid Social, Technology Advice, security_info_watch</a:t>
+              <a:t>utm_campaign is optional and reserved for future use; omit it for standard tracking URLs today.</a:t>
             </a:r>
           </a:p>
         </p:txBody>
@@ -3703,7 +3708,7 @@
               </a:defRPr>
             </a:pPr>
             <a:r>
-              <a:t>Facilitator note: The query string itself uses &amp;, %, ?, and =, but parameter values should not include those characters except the required %ecid! macro for utm_creative.</a:t>
+              <a:t>Facilitator note: Source deck detail: utm_campaign omission is not a defect today.</a:t>
             </a:r>
           </a:p>
         </p:txBody>
@@ -3842,7 +3847,7 @@
               </a:defRPr>
             </a:pPr>
             <a:r>
-              <a:t>Approved `utm_medium` values</a:t>
+              <a:t>What each required value does</a:t>
             </a:r>
           </a:p>
         </p:txBody>
@@ -3875,12 +3880,12 @@
               </a:spcAft>
               <a:defRPr sz="1300">
                 <a:solidFill>
-                  <a:srgbClr val="1F2937"/>
-                </a:solidFill>
-              </a:defRPr>
-            </a:pPr>
-            <a:r>
-              <a:t>paid-direct</a:t>
+                  <a:srgbClr val="5C7080"/>
+                </a:solidFill>
+              </a:defRPr>
+            </a:pPr>
+            <a:r>
+              <a:t>Value | Purpose | Training takeaway</a:t>
             </a:r>
           </a:p>
           <a:p>
@@ -3890,12 +3895,12 @@
               </a:spcAft>
               <a:defRPr sz="1300">
                 <a:solidFill>
-                  <a:srgbClr val="1F2937"/>
-                </a:solidFill>
-              </a:defRPr>
-            </a:pPr>
-            <a:r>
-              <a:t>programmatic</a:t>
+                  <a:srgbClr val="5C7080"/>
+                </a:solidFill>
+              </a:defRPr>
+            </a:pPr>
+            <a:r>
+              <a:t>ccid | Identifies the channel activation in the system of record | Required on every tracking URL</a:t>
             </a:r>
           </a:p>
           <a:p>
@@ -3905,12 +3910,12 @@
               </a:spcAft>
               <a:defRPr sz="1300">
                 <a:solidFill>
-                  <a:srgbClr val="1F2937"/>
-                </a:solidFill>
-              </a:defRPr>
-            </a:pPr>
-            <a:r>
-              <a:t>cpc</a:t>
+                  <a:srgbClr val="5C7080"/>
+                </a:solidFill>
+              </a:defRPr>
+            </a:pPr>
+            <a:r>
+              <a:t>dtid | Identifies channel and platform/vendor in the legacy framework | Required during current hybrid state</a:t>
             </a:r>
           </a:p>
           <a:p>
@@ -3920,12 +3925,12 @@
               </a:spcAft>
               <a:defRPr sz="1300">
                 <a:solidFill>
-                  <a:srgbClr val="1F2937"/>
-                </a:solidFill>
-              </a:defRPr>
-            </a:pPr>
-            <a:r>
-              <a:t>paid-social</a:t>
+                  <a:srgbClr val="5C7080"/>
+                </a:solidFill>
+              </a:defRPr>
+            </a:pPr>
+            <a:r>
+              <a:t>utm_id | Passes the campaign identifier into analytics | Must equal ccid exactly today</a:t>
             </a:r>
           </a:p>
           <a:p>
@@ -3935,12 +3940,12 @@
               </a:spcAft>
               <a:defRPr sz="1300">
                 <a:solidFill>
-                  <a:srgbClr val="1F2937"/>
-                </a:solidFill>
-              </a:defRPr>
-            </a:pPr>
-            <a:r>
-              <a:t>social</a:t>
+                  <a:srgbClr val="5C7080"/>
+                </a:solidFill>
+              </a:defRPr>
+            </a:pPr>
+            <a:r>
+              <a:t>utm_medium | Identifies the marketing channel | Highest-priority channel classification input</a:t>
             </a:r>
           </a:p>
           <a:p>
@@ -3950,117 +3955,12 @@
               </a:spcAft>
               <a:defRPr sz="1300">
                 <a:solidFill>
-                  <a:srgbClr val="1F2937"/>
-                </a:solidFill>
-              </a:defRPr>
-            </a:pPr>
-            <a:r>
-              <a:t>syndication</a:t>
-            </a:r>
-          </a:p>
-          <a:p>
-            <a:pPr>
-              <a:spcAft>
-                <a:spcPts val="300"/>
-              </a:spcAft>
-              <a:defRPr sz="1300">
-                <a:solidFill>
-                  <a:srgbClr val="1F2937"/>
-                </a:solidFill>
-              </a:defRPr>
-            </a:pPr>
-            <a:r>
-              <a:t>ratings-reviews</a:t>
-            </a:r>
-          </a:p>
-          <a:p>
-            <a:pPr>
-              <a:spcAft>
-                <a:spcPts val="300"/>
-              </a:spcAft>
-              <a:defRPr sz="1300">
-                <a:solidFill>
-                  <a:srgbClr val="1F2937"/>
-                </a:solidFill>
-              </a:defRPr>
-            </a:pPr>
-            <a:r>
-              <a:t>email</a:t>
-            </a:r>
-          </a:p>
-          <a:p>
-            <a:pPr>
-              <a:spcAft>
-                <a:spcPts val="300"/>
-              </a:spcAft>
-              <a:defRPr sz="1300">
-                <a:solidFill>
-                  <a:srgbClr val="1F2937"/>
-                </a:solidFill>
-              </a:defRPr>
-            </a:pPr>
-            <a:r>
-              <a:t>direct-mail</a:t>
-            </a:r>
-          </a:p>
-          <a:p>
-            <a:pPr>
-              <a:spcAft>
-                <a:spcPts val="300"/>
-              </a:spcAft>
-              <a:defRPr sz="1300">
-                <a:solidFill>
-                  <a:srgbClr val="1F2937"/>
-                </a:solidFill>
-              </a:defRPr>
-            </a:pPr>
-            <a:r>
-              <a:t>web-referral</a:t>
-            </a:r>
-          </a:p>
-          <a:p>
-            <a:pPr>
-              <a:spcAft>
-                <a:spcPts val="300"/>
-              </a:spcAft>
-              <a:defRPr sz="1300" b="1">
-                <a:solidFill>
-                  <a:srgbClr val="005596"/>
-                </a:solidFill>
-              </a:defRPr>
-            </a:pPr>
-            <a:r>
-              <a:t>Important:</a:t>
-            </a:r>
-          </a:p>
-          <a:p>
-            <a:pPr>
-              <a:spcAft>
-                <a:spcPts val="300"/>
-              </a:spcAft>
-              <a:defRPr sz="1300">
-                <a:solidFill>
-                  <a:srgbClr val="1F2937"/>
-                </a:solidFill>
-              </a:defRPr>
-            </a:pPr>
-            <a:r>
-              <a:t>web-referral is for URL generator or manual builds only.</a:t>
-            </a:r>
-          </a:p>
-          <a:p>
-            <a:pPr>
-              <a:spcAft>
-                <a:spcPts val="300"/>
-              </a:spcAft>
-              <a:defRPr sz="1300">
-                <a:solidFill>
-                  <a:srgbClr val="1F2937"/>
-                </a:solidFill>
-              </a:defRPr>
-            </a:pPr>
-            <a:r>
-              <a:t>No Workfront project type exists for web referral today.</a:t>
+                  <a:srgbClr val="5C7080"/>
+                </a:solidFill>
+              </a:defRPr>
+            </a:pPr>
+            <a:r>
+              <a:t>utm_source | Identifies vendor or platform within the channel | Must come from approved mappings</a:t>
             </a:r>
           </a:p>
         </p:txBody>
@@ -4114,7 +4014,7 @@
               </a:defRPr>
             </a:pPr>
             <a:r>
-              <a:t>Facilitator note: utm_medium is auto-populated based on channel type, not a user-facing dropdown.</a:t>
+              <a:t>Facilitator note: Reinforce that ccid and utm_id are the same identifier passed in two ways in the current state.</a:t>
             </a:r>
           </a:p>
         </p:txBody>
@@ -4253,7 +4153,7 @@
               </a:defRPr>
             </a:pPr>
             <a:r>
-              <a:t>`utm_source` depends on channel</a:t>
+              <a:t>When to use Campaign Tagging and Tracking IDs</a:t>
             </a:r>
           </a:p>
         </p:txBody>
@@ -4284,6 +4184,21 @@
               <a:spcAft>
                 <a:spcPts val="300"/>
               </a:spcAft>
+              <a:defRPr sz="1500" b="1">
+                <a:solidFill>
+                  <a:srgbClr val="005596"/>
+                </a:solidFill>
+              </a:defRPr>
+            </a:pPr>
+            <a:r>
+              <a:t>Use ccid and dtid for:</a:t>
+            </a:r>
+          </a:p>
+          <a:p>
+            <a:pPr>
+              <a:spcAft>
+                <a:spcPts val="300"/>
+              </a:spcAft>
               <a:defRPr sz="1500">
                 <a:solidFill>
                   <a:srgbClr val="1F2937"/>
@@ -4291,7 +4206,37 @@
               </a:defRPr>
             </a:pPr>
             <a:r>
-              <a:t>utm_source identifies the vendor or platform within the channel.</a:t>
+              <a:t>All activations in the current hybrid state</a:t>
+            </a:r>
+          </a:p>
+          <a:p>
+            <a:pPr>
+              <a:spcAft>
+                <a:spcPts val="300"/>
+              </a:spcAft>
+              <a:defRPr sz="1500">
+                <a:solidFill>
+                  <a:srgbClr val="1F2937"/>
+                </a:solidFill>
+              </a:defRPr>
+            </a:pPr>
+            <a:r>
+              <a:t>Reporting that still depends on legacy campaign and channel identifiers</a:t>
+            </a:r>
+          </a:p>
+          <a:p>
+            <a:pPr>
+              <a:spcAft>
+                <a:spcPts val="300"/>
+              </a:spcAft>
+              <a:defRPr sz="1500">
+                <a:solidFill>
+                  <a:srgbClr val="1F2937"/>
+                </a:solidFill>
+              </a:defRPr>
+            </a:pPr>
+            <a:r>
+              <a:t>Maintaining continuity while Workfront Channel IDs and UTM-based attribution mature</a:t>
             </a:r>
           </a:p>
           <a:p>
@@ -4306,7 +4251,7 @@
               </a:defRPr>
             </a:pPr>
             <a:r>
-              <a:t>Examples:</a:t>
+              <a:t>Do not:</a:t>
             </a:r>
           </a:p>
           <a:p>
@@ -4321,7 +4266,7 @@
               </a:defRPr>
             </a:pPr>
             <a:r>
-              <a:t>Email: eloqua, marketo, salesforce</a:t>
+              <a:t>Drop ccid or dtid before future-state guidance says they are retired</a:t>
             </a:r>
           </a:p>
           <a:p>
@@ -4336,7 +4281,7 @@
               </a:defRPr>
             </a:pPr>
             <a:r>
-              <a:t>Paid Direct: bloomberg, foundry, techtarget</a:t>
+              <a:t>Create new ID formats outside the approved standard</a:t>
             </a:r>
           </a:p>
           <a:p>
@@ -4351,67 +4296,7 @@
               </a:defRPr>
             </a:pPr>
             <a:r>
-              <a:t>Programmatic: dv360, youtube</a:t>
-            </a:r>
-          </a:p>
-          <a:p>
-            <a:pPr>
-              <a:spcAft>
-                <a:spcPts val="300"/>
-              </a:spcAft>
-              <a:defRPr sz="1500">
-                <a:solidFill>
-                  <a:srgbClr val="1F2937"/>
-                </a:solidFill>
-              </a:defRPr>
-            </a:pPr>
-            <a:r>
-              <a:t>Paid Social / Organic Social: linkedin, reddit, x, youtube</a:t>
-            </a:r>
-          </a:p>
-          <a:p>
-            <a:pPr>
-              <a:spcAft>
-                <a:spcPts val="300"/>
-              </a:spcAft>
-              <a:defRPr sz="1500">
-                <a:solidFill>
-                  <a:srgbClr val="1F2937"/>
-                </a:solidFill>
-              </a:defRPr>
-            </a:pPr>
-            <a:r>
-              <a:t>Paid Search: google, bing, baidu</a:t>
-            </a:r>
-          </a:p>
-          <a:p>
-            <a:pPr>
-              <a:spcAft>
-                <a:spcPts val="300"/>
-              </a:spcAft>
-              <a:defRPr sz="1500">
-                <a:solidFill>
-                  <a:srgbClr val="1F2937"/>
-                </a:solidFill>
-              </a:defRPr>
-            </a:pPr>
-            <a:r>
-              <a:t>Ratings and Reviews: g2, gartner, trustradius</a:t>
-            </a:r>
-          </a:p>
-          <a:p>
-            <a:pPr>
-              <a:spcAft>
-                <a:spcPts val="300"/>
-              </a:spcAft>
-              <a:defRPr sz="1500">
-                <a:solidFill>
-                  <a:srgbClr val="1F2937"/>
-                </a:solidFill>
-              </a:defRPr>
-            </a:pPr>
-            <a:r>
-              <a:t>Syndication: activate, technologyadvice, netline</a:t>
+              <a:t>Let utm_id differ from ccid</a:t>
             </a:r>
           </a:p>
         </p:txBody>
@@ -4465,7 +4350,7 @@
               </a:defRPr>
             </a:pPr>
             <a:r>
-              <a:t>Facilitator note: A value can appear in more than one channel, such as foundry or trustradius; the combination of source and medium gives the reporting context.</a:t>
+              <a:t>Facilitator note: ccid must start with cc and be 8 characters long, for example cc008317.</a:t>
             </a:r>
           </a:p>
         </p:txBody>
@@ -4604,7 +4489,7 @@
               </a:defRPr>
             </a:pPr>
             <a:r>
-              <a:t>Channel-specific rules users often miss</a:t>
+              <a:t>When to use UTM parameters</a:t>
             </a:r>
           </a:p>
         </p:txBody>
@@ -4635,164 +4520,134 @@
               <a:spcAft>
                 <a:spcPts val="300"/>
               </a:spcAft>
-              <a:defRPr sz="1300">
-                <a:solidFill>
-                  <a:srgbClr val="1F2937"/>
-                </a:solidFill>
-              </a:defRPr>
-            </a:pPr>
-            <a:r>
-              <a:t>Paid Programmatic:</a:t>
-            </a:r>
-          </a:p>
-          <a:p>
-            <a:pPr lvl="1">
-              <a:spcAft>
-                <a:spcPts val="300"/>
-              </a:spcAft>
-              <a:defRPr sz="1300">
-                <a:solidFill>
-                  <a:srgbClr val="1F2937"/>
-                </a:solidFill>
-              </a:defRPr>
-            </a:pPr>
-            <a:r>
-              <a:t>Show only DV360 and YouTube in Workfront today.</a:t>
-            </a:r>
-          </a:p>
-          <a:p>
-            <a:pPr lvl="1">
-              <a:spcAft>
-                <a:spcPts val="300"/>
-              </a:spcAft>
-              <a:defRPr sz="1300">
-                <a:solidFill>
-                  <a:srgbClr val="1F2937"/>
-                </a:solidFill>
-              </a:defRPr>
-            </a:pPr>
-            <a:r>
-              <a:t>TradeDesk is reserved for future use and hidden in the UI.</a:t>
-            </a:r>
-          </a:p>
-          <a:p>
-            <a:pPr lvl="1">
-              <a:spcAft>
-                <a:spcPts val="300"/>
-              </a:spcAft>
-              <a:defRPr sz="1300">
-                <a:solidFill>
-                  <a:srgbClr val="1F2937"/>
-                </a:solidFill>
-              </a:defRPr>
-            </a:pPr>
-            <a:r>
-              <a:t>Always append utm_creative=%ecid!.</a:t>
-            </a:r>
-          </a:p>
-          <a:p>
-            <a:pPr>
-              <a:spcAft>
-                <a:spcPts val="300"/>
-              </a:spcAft>
-              <a:defRPr sz="1300">
-                <a:solidFill>
-                  <a:srgbClr val="1F2937"/>
-                </a:solidFill>
-              </a:defRPr>
-            </a:pPr>
-            <a:r>
-              <a:t>Paid Direct, Paid Programmatic, Paid Social:</a:t>
-            </a:r>
-          </a:p>
-          <a:p>
-            <a:pPr lvl="1">
-              <a:spcAft>
-                <a:spcPts val="300"/>
-              </a:spcAft>
-              <a:defRPr sz="1300">
-                <a:solidFill>
-                  <a:srgbClr val="1F2937"/>
-                </a:solidFill>
-              </a:defRPr>
-            </a:pPr>
-            <a:r>
-              <a:t>Require utm_creative=%ecid!.</a:t>
-            </a:r>
-          </a:p>
-          <a:p>
-            <a:pPr>
-              <a:spcAft>
-                <a:spcPts val="300"/>
-              </a:spcAft>
-              <a:defRPr sz="1300">
-                <a:solidFill>
-                  <a:srgbClr val="1F2937"/>
-                </a:solidFill>
-              </a:defRPr>
-            </a:pPr>
-            <a:r>
-              <a:t>Direct Mail:</a:t>
-            </a:r>
-          </a:p>
-          <a:p>
-            <a:pPr lvl="1">
-              <a:spcAft>
-                <a:spcPts val="300"/>
-              </a:spcAft>
-              <a:defRPr sz="1300">
-                <a:solidFill>
-                  <a:srgbClr val="1F2937"/>
-                </a:solidFill>
-              </a:defRPr>
-            </a:pPr>
-            <a:r>
-              <a:t>No approved utm_source list exists yet.</a:t>
-            </a:r>
-          </a:p>
-          <a:p>
-            <a:pPr lvl="1">
-              <a:spcAft>
-                <a:spcPts val="300"/>
-              </a:spcAft>
-              <a:defRPr sz="1300">
-                <a:solidFill>
-                  <a:srgbClr val="1F2937"/>
-                </a:solidFill>
-              </a:defRPr>
-            </a:pPr>
-            <a:r>
-              <a:t>Use lowercase and hyphens until standardized values are published.</a:t>
-            </a:r>
-          </a:p>
-          <a:p>
-            <a:pPr>
-              <a:spcAft>
-                <a:spcPts val="300"/>
-              </a:spcAft>
-              <a:defRPr sz="1300">
-                <a:solidFill>
-                  <a:srgbClr val="1F2937"/>
-                </a:solidFill>
-              </a:defRPr>
-            </a:pPr>
-            <a:r>
-              <a:t>Paid Direct legacy sources:</a:t>
-            </a:r>
-          </a:p>
-          <a:p>
-            <a:pPr lvl="1">
-              <a:spcAft>
-                <a:spcPts val="300"/>
-              </a:spcAft>
-              <a:defRPr sz="1300">
-                <a:solidFill>
-                  <a:srgbClr val="1F2937"/>
-                </a:solidFill>
-              </a:defRPr>
-            </a:pPr>
-            <a:r>
-              <a:t>Under review; do not add new activations using those values.</a:t>
+              <a:defRPr sz="1500" b="1">
+                <a:solidFill>
+                  <a:srgbClr val="005596"/>
+                </a:solidFill>
+              </a:defRPr>
+            </a:pPr>
+            <a:r>
+              <a:t>Use UTMs whenever an activation drives traffic to a Cisco central marketing-owned property.</a:t>
+            </a:r>
+          </a:p>
+          <a:p>
+            <a:pPr>
+              <a:spcAft>
+                <a:spcPts val="300"/>
+              </a:spcAft>
+              <a:defRPr sz="1500" b="1">
+                <a:solidFill>
+                  <a:srgbClr val="005596"/>
+                </a:solidFill>
+              </a:defRPr>
+            </a:pPr>
+            <a:r>
+              <a:t>Required today:</a:t>
+            </a:r>
+          </a:p>
+          <a:p>
+            <a:pPr>
+              <a:spcAft>
+                <a:spcPts val="300"/>
+              </a:spcAft>
+              <a:defRPr sz="1500">
+                <a:solidFill>
+                  <a:srgbClr val="1F2937"/>
+                </a:solidFill>
+              </a:defRPr>
+            </a:pPr>
+            <a:r>
+              <a:t>utm_id: campaign/activation identifier; equals ccid today</a:t>
+            </a:r>
+          </a:p>
+          <a:p>
+            <a:pPr>
+              <a:spcAft>
+                <a:spcPts val="300"/>
+              </a:spcAft>
+              <a:defRPr sz="1500">
+                <a:solidFill>
+                  <a:srgbClr val="1F2937"/>
+                </a:solidFill>
+              </a:defRPr>
+            </a:pPr>
+            <a:r>
+              <a:t>utm_medium: channel classification</a:t>
+            </a:r>
+          </a:p>
+          <a:p>
+            <a:pPr>
+              <a:spcAft>
+                <a:spcPts val="300"/>
+              </a:spcAft>
+              <a:defRPr sz="1500">
+                <a:solidFill>
+                  <a:srgbClr val="1F2937"/>
+                </a:solidFill>
+              </a:defRPr>
+            </a:pPr>
+            <a:r>
+              <a:t>utm_source: platform/vendor classification</a:t>
+            </a:r>
+          </a:p>
+          <a:p>
+            <a:pPr>
+              <a:spcAft>
+                <a:spcPts val="300"/>
+              </a:spcAft>
+              <a:defRPr sz="1500" b="1">
+                <a:solidFill>
+                  <a:srgbClr val="005596"/>
+                </a:solidFill>
+              </a:defRPr>
+            </a:pPr>
+            <a:r>
+              <a:t>Conditional:</a:t>
+            </a:r>
+          </a:p>
+          <a:p>
+            <a:pPr>
+              <a:spcAft>
+                <a:spcPts val="300"/>
+              </a:spcAft>
+              <a:defRPr sz="1500">
+                <a:solidFill>
+                  <a:srgbClr val="1F2937"/>
+                </a:solidFill>
+              </a:defRPr>
+            </a:pPr>
+            <a:r>
+              <a:t>utm_creative=%ecid!: only for Paid Direct, Paid Programmatic, and Paid Social</a:t>
+            </a:r>
+          </a:p>
+          <a:p>
+            <a:pPr>
+              <a:spcAft>
+                <a:spcPts val="300"/>
+              </a:spcAft>
+              <a:defRPr sz="1500" b="1">
+                <a:solidFill>
+                  <a:srgbClr val="005596"/>
+                </a:solidFill>
+              </a:defRPr>
+            </a:pPr>
+            <a:r>
+              <a:t>Reserved:</a:t>
+            </a:r>
+          </a:p>
+          <a:p>
+            <a:pPr>
+              <a:spcAft>
+                <a:spcPts val="300"/>
+              </a:spcAft>
+              <a:defRPr sz="1500">
+                <a:solidFill>
+                  <a:srgbClr val="1F2937"/>
+                </a:solidFill>
+              </a:defRPr>
+            </a:pPr>
+            <a:r>
+              <a:t>utm_campaign: future use; omit today unless the standard changes</a:t>
             </a:r>
           </a:p>
         </p:txBody>
@@ -4846,7 +4701,7 @@
               </a:defRPr>
             </a:pPr>
             <a:r>
-              <a:t>Facilitator note: Users should not use legacy sources for new activations unless governance explicitly approves.</a:t>
+              <a:t>Facilitator note: UTMs can be created via Workfront, Stensul, and Manual URL Builder, but the same value rules apply.</a:t>
             </a:r>
           </a:p>
         </p:txBody>
@@ -4985,75 +4840,21 @@
               </a:defRPr>
             </a:pPr>
             <a:r>
-              <a:t>Precedence and persistence logic - FY27 edit slide</a:t>
-            </a:r>
-          </a:p>
-        </p:txBody>
-      </p:sp>
-      <p:sp>
-        <p:nvSpPr>
-          <p:cNvPr id="4" name="Rounded Rectangle 3"/>
-          <p:cNvSpPr/>
-          <p:nvPr/>
-        </p:nvSpPr>
-        <p:spPr>
-          <a:xfrm>
-            <a:off x="658368" y="1078992"/>
-            <a:ext cx="10881360" cy="594360"/>
-          </a:xfrm>
-          <a:prstGeom prst="roundRect">
-            <a:avLst/>
-          </a:prstGeom>
-          <a:solidFill>
-            <a:srgbClr val="E2F0FA"/>
-          </a:solidFill>
-          <a:ln>
-            <a:solidFill>
-              <a:srgbClr val="005596"/>
-            </a:solidFill>
-          </a:ln>
-        </p:spPr>
-        <p:style>
-          <a:lnRef idx="1">
-            <a:schemeClr val="accent1"/>
-          </a:lnRef>
-          <a:fillRef idx="3">
-            <a:schemeClr val="accent1"/>
-          </a:fillRef>
-          <a:effectRef idx="2">
-            <a:schemeClr val="accent1"/>
-          </a:effectRef>
-          <a:fontRef idx="minor">
-            <a:schemeClr val="lt1"/>
-          </a:fontRef>
-        </p:style>
-        <p:txBody>
-          <a:bodyPr rtlCol="0" anchor="ctr"/>
-          <a:lstStyle/>
-          <a:p>
-            <a:pPr algn="ctr">
-              <a:defRPr b="1" sz="1300">
-                <a:solidFill>
-                  <a:srgbClr val="005596"/>
-                </a:solidFill>
-              </a:defRPr>
-            </a:pPr>
-            <a:r>
-              <a:t>Key repository-backed rule: utm_medium is the highest-priority channel classification input.</a:t>
-            </a:r>
-          </a:p>
-        </p:txBody>
-      </p:sp>
-      <p:sp>
-        <p:nvSpPr>
-          <p:cNvPr id="5" name="TextBox 4"/>
+              <a:t>Use the right build path</a:t>
+            </a:r>
+          </a:p>
+        </p:txBody>
+      </p:sp>
+      <p:sp>
+        <p:nvSpPr>
+          <p:cNvPr id="4" name="TextBox 3"/>
           <p:cNvSpPr txBox="1"/>
           <p:nvPr/>
         </p:nvSpPr>
         <p:spPr>
           <a:xfrm>
-            <a:off x="658368" y="1828800"/>
-            <a:ext cx="10881360" cy="3703320"/>
+            <a:off x="658368" y="1143000"/>
+            <a:ext cx="10881360" cy="4526280"/>
           </a:xfrm>
           <a:prstGeom prst="rect">
             <a:avLst/>
@@ -5070,126 +4871,81 @@
               <a:spcAft>
                 <a:spcPts val="300"/>
               </a:spcAft>
-              <a:defRPr sz="1500" b="1">
-                <a:solidFill>
-                  <a:srgbClr val="005596"/>
-                </a:solidFill>
-              </a:defRPr>
-            </a:pPr>
-            <a:r>
-              <a:t>Training implication:</a:t>
-            </a:r>
-          </a:p>
-          <a:p>
-            <a:pPr>
-              <a:spcAft>
-                <a:spcPts val="300"/>
-              </a:spcAft>
-              <a:defRPr sz="1500">
-                <a:solidFill>
-                  <a:srgbClr val="1F2937"/>
-                </a:solidFill>
-              </a:defRPr>
-            </a:pPr>
-            <a:r>
-              <a:t>If utm_medium is missing, inconsistent, or manually changed, channel reporting can be misclassified.</a:t>
-            </a:r>
-          </a:p>
-          <a:p>
-            <a:pPr>
-              <a:spcAft>
-                <a:spcPts val="300"/>
-              </a:spcAft>
-              <a:defRPr sz="1500">
-                <a:solidFill>
-                  <a:srgbClr val="1F2937"/>
-                </a:solidFill>
-              </a:defRPr>
-            </a:pPr>
-            <a:r>
-              <a:t>If utm_source does not match the selected channel context, vendor/platform reporting can be split or incorrectly grouped.</a:t>
-            </a:r>
-          </a:p>
-          <a:p>
-            <a:pPr>
-              <a:spcAft>
-                <a:spcPts val="300"/>
-              </a:spcAft>
-              <a:defRPr sz="1500">
-                <a:solidFill>
-                  <a:srgbClr val="1F2937"/>
-                </a:solidFill>
-              </a:defRPr>
-            </a:pPr>
-            <a:r>
-              <a:t>If persisted values are retained downstream, early mistakes may continue to affect reporting until corrected.</a:t>
-            </a:r>
-          </a:p>
-          <a:p>
-            <a:pPr>
-              <a:spcAft>
-                <a:spcPts val="300"/>
-              </a:spcAft>
-              <a:defRPr sz="1500" b="1">
-                <a:solidFill>
-                  <a:srgbClr val="005596"/>
-                </a:solidFill>
-              </a:defRPr>
-            </a:pPr>
-            <a:r>
-              <a:t>FY27 owner edits:</a:t>
-            </a:r>
-          </a:p>
-          <a:p>
-            <a:pPr>
-              <a:spcAft>
-                <a:spcPts val="300"/>
-              </a:spcAft>
-              <a:defRPr sz="1500">
-                <a:solidFill>
-                  <a:srgbClr val="1F2937"/>
-                </a:solidFill>
-              </a:defRPr>
-            </a:pPr>
-            <a:r>
-              <a:t>Add the current FY27 precedence order here.</a:t>
-            </a:r>
-          </a:p>
-          <a:p>
-            <a:pPr>
-              <a:spcAft>
-                <a:spcPts val="300"/>
-              </a:spcAft>
-              <a:defRPr sz="1500">
-                <a:solidFill>
-                  <a:srgbClr val="1F2937"/>
-                </a:solidFill>
-              </a:defRPr>
-            </a:pPr>
-            <a:r>
-              <a:t>Add the current FY27 persistence rules here.</a:t>
-            </a:r>
-          </a:p>
-          <a:p>
-            <a:pPr>
-              <a:spcAft>
-                <a:spcPts val="300"/>
-              </a:spcAft>
-              <a:defRPr sz="1500">
-                <a:solidFill>
-                  <a:srgbClr val="1F2937"/>
-                </a:solidFill>
-              </a:defRPr>
-            </a:pPr>
-            <a:r>
-              <a:t>Add any exceptions by channel, tool, or reporting surface here.</a:t>
-            </a:r>
-          </a:p>
-        </p:txBody>
-      </p:sp>
-      <p:sp>
-        <p:nvSpPr>
-          <p:cNvPr id="6" name="Rounded Rectangle 5"/>
+              <a:defRPr sz="1300">
+                <a:solidFill>
+                  <a:srgbClr val="5C7080"/>
+                </a:solidFill>
+              </a:defRPr>
+            </a:pPr>
+            <a:r>
+              <a:t>Situation | Recommended path | Why</a:t>
+            </a:r>
+          </a:p>
+          <a:p>
+            <a:pPr>
+              <a:spcAft>
+                <a:spcPts val="300"/>
+              </a:spcAft>
+              <a:defRPr sz="1300">
+                <a:solidFill>
+                  <a:srgbClr val="5C7080"/>
+                </a:solidFill>
+              </a:defRPr>
+            </a:pPr>
+            <a:r>
+              <a:t>Workfront channel activation | Workfront-generated URL | Centralized intake and mapping source of truth</a:t>
+            </a:r>
+          </a:p>
+          <a:p>
+            <a:pPr>
+              <a:spcAft>
+                <a:spcPts val="300"/>
+              </a:spcAft>
+              <a:defRPr sz="1300">
+                <a:solidFill>
+                  <a:srgbClr val="5C7080"/>
+                </a:solidFill>
+              </a:defRPr>
+            </a:pPr>
+            <a:r>
+              <a:t>Email or other supported non-Workfront flow | Stensul when applicable | Same UTM rules, managed by the owning team</a:t>
+            </a:r>
+          </a:p>
+          <a:p>
+            <a:pPr>
+              <a:spcAft>
+                <a:spcPts val="300"/>
+              </a:spcAft>
+              <a:defRPr sz="1300">
+                <a:solidFill>
+                  <a:srgbClr val="5C7080"/>
+                </a:solidFill>
+              </a:defRPr>
+            </a:pPr>
+            <a:r>
+              <a:t>External web referral or exception | Manual URL Builder | web-referral is manual-build only today</a:t>
+            </a:r>
+          </a:p>
+          <a:p>
+            <a:pPr>
+              <a:spcAft>
+                <a:spcPts val="300"/>
+              </a:spcAft>
+              <a:defRPr sz="1300">
+                <a:solidFill>
+                  <a:srgbClr val="5C7080"/>
+                </a:solidFill>
+              </a:defRPr>
+            </a:pPr>
+            <a:r>
+              <a:t>Missing source/medium option | Escalate for mapping update | Avoid creating unapproved values</a:t>
+            </a:r>
+          </a:p>
+        </p:txBody>
+      </p:sp>
+      <p:sp>
+        <p:nvSpPr>
+          <p:cNvPr id="5" name="Rounded Rectangle 4"/>
           <p:cNvSpPr/>
           <p:nvPr/>
         </p:nvSpPr>
@@ -5236,14 +4992,14 @@
               </a:defRPr>
             </a:pPr>
             <a:r>
-              <a:t>Facilitator note: The repository does not include the full FY27 persistence specification. Keep this slide as the update point when that logic is finalized.</a:t>
-            </a:r>
-          </a:p>
-        </p:txBody>
-      </p:sp>
-      <p:sp>
-        <p:nvSpPr>
-          <p:cNvPr id="7" name="TextBox 6"/>
+              <a:t>Facilitator note: Source says Workfront execution source of truth is Source and Mediums.xlsx. If source documents differ, Source and Mediums.xlsx wins.</a:t>
+            </a:r>
+          </a:p>
+        </p:txBody>
+      </p:sp>
+      <p:sp>
+        <p:nvSpPr>
+          <p:cNvPr id="6" name="TextBox 5"/>
           <p:cNvSpPr txBox="1"/>
           <p:nvPr/>
         </p:nvSpPr>
@@ -5375,75 +5131,21 @@
               </a:defRPr>
             </a:pPr>
             <a:r>
-              <a:t>What happens when tagging is wrong</a:t>
-            </a:r>
-          </a:p>
-        </p:txBody>
-      </p:sp>
-      <p:sp>
-        <p:nvSpPr>
-          <p:cNvPr id="4" name="Rounded Rectangle 3"/>
-          <p:cNvSpPr/>
-          <p:nvPr/>
-        </p:nvSpPr>
-        <p:spPr>
-          <a:xfrm>
-            <a:off x="658368" y="1097280"/>
-            <a:ext cx="10881360" cy="530352"/>
-          </a:xfrm>
-          <a:prstGeom prst="roundRect">
-            <a:avLst/>
-          </a:prstGeom>
-          <a:solidFill>
-            <a:srgbClr val="FFF3E0"/>
-          </a:solidFill>
-          <a:ln>
-            <a:solidFill>
-              <a:srgbClr val="D67800"/>
-            </a:solidFill>
-          </a:ln>
-        </p:spPr>
-        <p:style>
-          <a:lnRef idx="1">
-            <a:schemeClr val="accent1"/>
-          </a:lnRef>
-          <a:fillRef idx="3">
-            <a:schemeClr val="accent1"/>
-          </a:fillRef>
-          <a:effectRef idx="2">
-            <a:schemeClr val="accent1"/>
-          </a:effectRef>
-          <a:fontRef idx="minor">
-            <a:schemeClr val="lt1"/>
-          </a:fontRef>
-        </p:style>
-        <p:txBody>
-          <a:bodyPr rtlCol="0" anchor="ctr"/>
-          <a:lstStyle/>
-          <a:p>
-            <a:pPr algn="ctr">
-              <a:defRPr b="1" sz="1300">
-                <a:solidFill>
-                  <a:srgbClr val="D67800"/>
-                </a:solidFill>
-              </a:defRPr>
-            </a:pPr>
-            <a:r>
-              <a:t>Bad tags create bad data; bad data drives the wrong optimization decisions.</a:t>
-            </a:r>
-          </a:p>
-        </p:txBody>
-      </p:sp>
-      <p:sp>
-        <p:nvSpPr>
-          <p:cNvPr id="5" name="TextBox 4"/>
+              <a:t>Global tagging rules</a:t>
+            </a:r>
+          </a:p>
+        </p:txBody>
+      </p:sp>
+      <p:sp>
+        <p:nvSpPr>
+          <p:cNvPr id="4" name="TextBox 3"/>
           <p:cNvSpPr txBox="1"/>
           <p:nvPr/>
         </p:nvSpPr>
         <p:spPr>
           <a:xfrm>
-            <a:off x="658368" y="1783080"/>
-            <a:ext cx="10881360" cy="3749039"/>
+            <a:off x="658368" y="1143000"/>
+            <a:ext cx="10881360" cy="4526280"/>
           </a:xfrm>
           <a:prstGeom prst="rect">
             <a:avLst/>
@@ -5467,7 +5169,7 @@
               </a:defRPr>
             </a:pPr>
             <a:r>
-              <a:t>Campaign activity to be disconnected from the system of record</a:t>
+              <a:t>All UTM values must be lowercase.</a:t>
             </a:r>
           </a:p>
           <a:p>
@@ -5482,7 +5184,7 @@
               </a:defRPr>
             </a:pPr>
             <a:r>
-              <a:t>utm_id and ccid mismatch, breaking campaign-level attribution</a:t>
+              <a:t>Use hyphens instead of spaces.</a:t>
             </a:r>
           </a:p>
           <a:p>
@@ -5497,7 +5199,7 @@
               </a:defRPr>
             </a:pPr>
             <a:r>
-              <a:t>Channel misclassification when utm_medium is wrong</a:t>
+              <a:t>Omit empty parameters entirely.</a:t>
             </a:r>
           </a:p>
           <a:p>
@@ -5512,7 +5214,7 @@
               </a:defRPr>
             </a:pPr>
             <a:r>
-              <a:t>Vendor/platform reporting errors when utm_source is wrong</a:t>
+              <a:t>utm_id must always match ccid.</a:t>
             </a:r>
           </a:p>
           <a:p>
@@ -5527,7 +5229,7 @@
               </a:defRPr>
             </a:pPr>
             <a:r>
-              <a:t>Creative reporting gaps when required utm_creative is missing</a:t>
+              <a:t>No spaces or special characters (&amp;, %, ?, =) in values.</a:t>
             </a:r>
           </a:p>
           <a:p>
@@ -5542,7 +5244,22 @@
               </a:defRPr>
             </a:pPr>
             <a:r>
-              <a:t>Duplicate reporting buckets caused by capitalization, spaces, or local naming variants</a:t>
+              <a:t>Use approved values; do not create local variants.</a:t>
+            </a:r>
+          </a:p>
+          <a:p>
+            <a:pPr>
+              <a:spcAft>
+                <a:spcPts val="300"/>
+              </a:spcAft>
+              <a:defRPr sz="1500" b="1">
+                <a:solidFill>
+                  <a:srgbClr val="005596"/>
+                </a:solidFill>
+              </a:defRPr>
+            </a:pPr>
+            <a:r>
+              <a:t>Examples:</a:t>
             </a:r>
           </a:p>
           <a:p>
@@ -5557,14 +5274,29 @@
               </a:defRPr>
             </a:pPr>
             <a:r>
-              <a:t>Cleanup work for Marketing Operations, Analytics, and Workfront teams</a:t>
-            </a:r>
-          </a:p>
-        </p:txBody>
-      </p:sp>
-      <p:sp>
-        <p:nvSpPr>
-          <p:cNvPr id="6" name="Rounded Rectangle 5"/>
+              <a:t>Correct: paid-social, technologyadvice, security-info-watch</a:t>
+            </a:r>
+          </a:p>
+          <a:p>
+            <a:pPr>
+              <a:spcAft>
+                <a:spcPts val="300"/>
+              </a:spcAft>
+              <a:defRPr sz="1500">
+                <a:solidFill>
+                  <a:srgbClr val="1F2937"/>
+                </a:solidFill>
+              </a:defRPr>
+            </a:pPr>
+            <a:r>
+              <a:t>Incorrect: Paid Social, Technology Advice, security_info_watch</a:t>
+            </a:r>
+          </a:p>
+        </p:txBody>
+      </p:sp>
+      <p:sp>
+        <p:nvSpPr>
+          <p:cNvPr id="5" name="Rounded Rectangle 4"/>
           <p:cNvSpPr/>
           <p:nvPr/>
         </p:nvSpPr>
@@ -5611,14 +5343,14 @@
               </a:defRPr>
             </a:pPr>
             <a:r>
-              <a:t>Facilitator note: Anchor this in business impact: bad tags create bad data, and bad data drives the wrong optimization decisions.</a:t>
-            </a:r>
-          </a:p>
-        </p:txBody>
-      </p:sp>
-      <p:sp>
-        <p:nvSpPr>
-          <p:cNvPr id="7" name="TextBox 6"/>
+              <a:t>Facilitator note: The query string itself uses &amp;, %, ?, and =, but parameter values should not include those characters except the required %ecid! macro for utm_creative.</a:t>
+            </a:r>
+          </a:p>
+        </p:txBody>
+      </p:sp>
+      <p:sp>
+        <p:nvSpPr>
+          <p:cNvPr id="6" name="TextBox 5"/>
           <p:cNvSpPr txBox="1"/>
           <p:nvPr/>
         </p:nvSpPr>
@@ -5750,7 +5482,7 @@
               </a:defRPr>
             </a:pPr>
             <a:r>
-              <a:t>Example - correct paid social URL</a:t>
+              <a:t>Approved `utm_medium` values</a:t>
             </a:r>
           </a:p>
         </p:txBody>
@@ -5781,6 +5513,156 @@
               <a:spcAft>
                 <a:spcPts val="300"/>
               </a:spcAft>
+              <a:defRPr sz="1300">
+                <a:solidFill>
+                  <a:srgbClr val="1F2937"/>
+                </a:solidFill>
+              </a:defRPr>
+            </a:pPr>
+            <a:r>
+              <a:t>paid-direct</a:t>
+            </a:r>
+          </a:p>
+          <a:p>
+            <a:pPr>
+              <a:spcAft>
+                <a:spcPts val="300"/>
+              </a:spcAft>
+              <a:defRPr sz="1300">
+                <a:solidFill>
+                  <a:srgbClr val="1F2937"/>
+                </a:solidFill>
+              </a:defRPr>
+            </a:pPr>
+            <a:r>
+              <a:t>programmatic</a:t>
+            </a:r>
+          </a:p>
+          <a:p>
+            <a:pPr>
+              <a:spcAft>
+                <a:spcPts val="300"/>
+              </a:spcAft>
+              <a:defRPr sz="1300">
+                <a:solidFill>
+                  <a:srgbClr val="1F2937"/>
+                </a:solidFill>
+              </a:defRPr>
+            </a:pPr>
+            <a:r>
+              <a:t>cpc</a:t>
+            </a:r>
+          </a:p>
+          <a:p>
+            <a:pPr>
+              <a:spcAft>
+                <a:spcPts val="300"/>
+              </a:spcAft>
+              <a:defRPr sz="1300">
+                <a:solidFill>
+                  <a:srgbClr val="1F2937"/>
+                </a:solidFill>
+              </a:defRPr>
+            </a:pPr>
+            <a:r>
+              <a:t>paid-social</a:t>
+            </a:r>
+          </a:p>
+          <a:p>
+            <a:pPr>
+              <a:spcAft>
+                <a:spcPts val="300"/>
+              </a:spcAft>
+              <a:defRPr sz="1300">
+                <a:solidFill>
+                  <a:srgbClr val="1F2937"/>
+                </a:solidFill>
+              </a:defRPr>
+            </a:pPr>
+            <a:r>
+              <a:t>social</a:t>
+            </a:r>
+          </a:p>
+          <a:p>
+            <a:pPr>
+              <a:spcAft>
+                <a:spcPts val="300"/>
+              </a:spcAft>
+              <a:defRPr sz="1300">
+                <a:solidFill>
+                  <a:srgbClr val="1F2937"/>
+                </a:solidFill>
+              </a:defRPr>
+            </a:pPr>
+            <a:r>
+              <a:t>syndication</a:t>
+            </a:r>
+          </a:p>
+          <a:p>
+            <a:pPr>
+              <a:spcAft>
+                <a:spcPts val="300"/>
+              </a:spcAft>
+              <a:defRPr sz="1300">
+                <a:solidFill>
+                  <a:srgbClr val="1F2937"/>
+                </a:solidFill>
+              </a:defRPr>
+            </a:pPr>
+            <a:r>
+              <a:t>ratings-reviews</a:t>
+            </a:r>
+          </a:p>
+          <a:p>
+            <a:pPr>
+              <a:spcAft>
+                <a:spcPts val="300"/>
+              </a:spcAft>
+              <a:defRPr sz="1300">
+                <a:solidFill>
+                  <a:srgbClr val="1F2937"/>
+                </a:solidFill>
+              </a:defRPr>
+            </a:pPr>
+            <a:r>
+              <a:t>email</a:t>
+            </a:r>
+          </a:p>
+          <a:p>
+            <a:pPr>
+              <a:spcAft>
+                <a:spcPts val="300"/>
+              </a:spcAft>
+              <a:defRPr sz="1300">
+                <a:solidFill>
+                  <a:srgbClr val="1F2937"/>
+                </a:solidFill>
+              </a:defRPr>
+            </a:pPr>
+            <a:r>
+              <a:t>direct-mail</a:t>
+            </a:r>
+          </a:p>
+          <a:p>
+            <a:pPr>
+              <a:spcAft>
+                <a:spcPts val="300"/>
+              </a:spcAft>
+              <a:defRPr sz="1300">
+                <a:solidFill>
+                  <a:srgbClr val="1F2937"/>
+                </a:solidFill>
+              </a:defRPr>
+            </a:pPr>
+            <a:r>
+              <a:t>web-referral</a:t>
+            </a:r>
+          </a:p>
+          <a:p>
+            <a:pPr>
+              <a:spcAft>
+                <a:spcPts val="300"/>
+              </a:spcAft>
               <a:defRPr sz="1300" b="1">
                 <a:solidFill>
                   <a:srgbClr val="005596"/>
@@ -5788,7 +5670,7 @@
               </a:defRPr>
             </a:pPr>
             <a:r>
-              <a:t>Scenario:</a:t>
+              <a:t>Important:</a:t>
             </a:r>
           </a:p>
           <a:p>
@@ -5803,7 +5685,7 @@
               </a:defRPr>
             </a:pPr>
             <a:r>
-              <a:t>Channel: Paid Social</a:t>
+              <a:t>web-referral is for URL generator or manual builds only.</a:t>
             </a:r>
           </a:p>
           <a:p>
@@ -5818,143 +5700,7 @@
               </a:defRPr>
             </a:pPr>
             <a:r>
-              <a:t>Platform: LinkedIn</a:t>
-            </a:r>
-          </a:p>
-          <a:p>
-            <a:pPr>
-              <a:spcAft>
-                <a:spcPts val="300"/>
-              </a:spcAft>
-              <a:defRPr sz="1300">
-                <a:solidFill>
-                  <a:srgbClr val="1F2937"/>
-                </a:solidFill>
-              </a:defRPr>
-            </a:pPr>
-            <a:r>
-              <a:t>CCID: cc008317</a:t>
-            </a:r>
-          </a:p>
-          <a:p>
-            <a:pPr>
-              <a:spcAft>
-                <a:spcPts val="300"/>
-              </a:spcAft>
-              <a:defRPr sz="1300">
-                <a:solidFill>
-                  <a:srgbClr val="1F2937"/>
-                </a:solidFill>
-              </a:defRPr>
-            </a:pPr>
-            <a:r>
-              <a:t>DTID: ppdllin001650</a:t>
-            </a:r>
-          </a:p>
-          <a:p>
-            <a:pPr>
-              <a:spcAft>
-                <a:spcPts val="300"/>
-              </a:spcAft>
-              <a:defRPr sz="1300" b="1">
-                <a:solidFill>
-                  <a:srgbClr val="005596"/>
-                </a:solidFill>
-              </a:defRPr>
-            </a:pPr>
-            <a:r>
-              <a:t>Correct format:</a:t>
-            </a:r>
-          </a:p>
-          <a:p>
-            <a:pPr>
-              <a:spcAft>
-                <a:spcPts val="300"/>
-              </a:spcAft>
-              <a:defRPr sz="1100">
-                <a:solidFill>
-                  <a:srgbClr val="008060"/>
-                </a:solidFill>
-                <a:latin typeface="Courier New"/>
-              </a:defRPr>
-            </a:pPr>
-            <a:r>
-              <a:t>URL?ccid=cc008317&amp;dtid=ppdllin001650&amp;utm_id=cc008317&amp;utm_medium=paid-social&amp;utm_source=linkedin&amp;utm_creative=%ecid!</a:t>
-            </a:r>
-          </a:p>
-          <a:p>
-            <a:pPr>
-              <a:spcAft>
-                <a:spcPts val="300"/>
-              </a:spcAft>
-              <a:defRPr sz="1300" b="1">
-                <a:solidFill>
-                  <a:srgbClr val="005596"/>
-                </a:solidFill>
-              </a:defRPr>
-            </a:pPr>
-            <a:r>
-              <a:t>Why it works:</a:t>
-            </a:r>
-          </a:p>
-          <a:p>
-            <a:pPr>
-              <a:spcAft>
-                <a:spcPts val="300"/>
-              </a:spcAft>
-              <a:defRPr sz="1300">
-                <a:solidFill>
-                  <a:srgbClr val="1F2937"/>
-                </a:solidFill>
-              </a:defRPr>
-            </a:pPr>
-            <a:r>
-              <a:t>utm_id equals ccid</a:t>
-            </a:r>
-          </a:p>
-          <a:p>
-            <a:pPr>
-              <a:spcAft>
-                <a:spcPts val="300"/>
-              </a:spcAft>
-              <a:defRPr sz="1300">
-                <a:solidFill>
-                  <a:srgbClr val="1F2937"/>
-                </a:solidFill>
-              </a:defRPr>
-            </a:pPr>
-            <a:r>
-              <a:t>utm_medium uses approved channel value</a:t>
-            </a:r>
-          </a:p>
-          <a:p>
-            <a:pPr>
-              <a:spcAft>
-                <a:spcPts val="300"/>
-              </a:spcAft>
-              <a:defRPr sz="1300">
-                <a:solidFill>
-                  <a:srgbClr val="1F2937"/>
-                </a:solidFill>
-              </a:defRPr>
-            </a:pPr>
-            <a:r>
-              <a:t>utm_source uses approved social platform value</a:t>
-            </a:r>
-          </a:p>
-          <a:p>
-            <a:pPr>
-              <a:spcAft>
-                <a:spcPts val="300"/>
-              </a:spcAft>
-              <a:defRPr sz="1300">
-                <a:solidFill>
-                  <a:srgbClr val="1F2937"/>
-                </a:solidFill>
-              </a:defRPr>
-            </a:pPr>
-            <a:r>
-              <a:t>utm_creative is included because Paid Social requires it</a:t>
+              <a:t>No Workfront project type exists for web referral today.</a:t>
             </a:r>
           </a:p>
         </p:txBody>
@@ -6008,7 +5754,7 @@
               </a:defRPr>
             </a:pPr>
             <a:r>
-              <a:t>Facilitator note: Use this as the walkthrough example for query-string order and conditional creative tagging.</a:t>
+              <a:t>Facilitator note: utm_medium is auto-populated based on channel type, not a user-facing dropdown.</a:t>
             </a:r>
           </a:p>
         </p:txBody>
@@ -6147,7 +5893,7 @@
               </a:defRPr>
             </a:pPr>
             <a:r>
-              <a:t>Example - correct email URL</a:t>
+              <a:t>`utm_source` depends on channel</a:t>
             </a:r>
           </a:p>
         </p:txBody>
@@ -6178,165 +5924,134 @@
               <a:spcAft>
                 <a:spcPts val="300"/>
               </a:spcAft>
-              <a:defRPr sz="1300" b="1">
+              <a:defRPr sz="1500">
+                <a:solidFill>
+                  <a:srgbClr val="1F2937"/>
+                </a:solidFill>
+              </a:defRPr>
+            </a:pPr>
+            <a:r>
+              <a:t>utm_source identifies the vendor or platform within the channel.</a:t>
+            </a:r>
+          </a:p>
+          <a:p>
+            <a:pPr>
+              <a:spcAft>
+                <a:spcPts val="300"/>
+              </a:spcAft>
+              <a:defRPr sz="1500" b="1">
                 <a:solidFill>
                   <a:srgbClr val="005596"/>
                 </a:solidFill>
               </a:defRPr>
             </a:pPr>
             <a:r>
-              <a:t>Scenario:</a:t>
-            </a:r>
-          </a:p>
-          <a:p>
-            <a:pPr>
-              <a:spcAft>
-                <a:spcPts val="300"/>
-              </a:spcAft>
-              <a:defRPr sz="1300">
-                <a:solidFill>
-                  <a:srgbClr val="1F2937"/>
-                </a:solidFill>
-              </a:defRPr>
-            </a:pPr>
-            <a:r>
-              <a:t>Channel: Email</a:t>
-            </a:r>
-          </a:p>
-          <a:p>
-            <a:pPr>
-              <a:spcAft>
-                <a:spcPts val="300"/>
-              </a:spcAft>
-              <a:defRPr sz="1300">
-                <a:solidFill>
-                  <a:srgbClr val="1F2937"/>
-                </a:solidFill>
-              </a:defRPr>
-            </a:pPr>
-            <a:r>
-              <a:t>Platform: Eloqua</a:t>
-            </a:r>
-          </a:p>
-          <a:p>
-            <a:pPr>
-              <a:spcAft>
-                <a:spcPts val="300"/>
-              </a:spcAft>
-              <a:defRPr sz="1300">
-                <a:solidFill>
-                  <a:srgbClr val="1F2937"/>
-                </a:solidFill>
-              </a:defRPr>
-            </a:pPr>
-            <a:r>
-              <a:t>CCID: cc008317</a:t>
-            </a:r>
-          </a:p>
-          <a:p>
-            <a:pPr>
-              <a:spcAft>
-                <a:spcPts val="300"/>
-              </a:spcAft>
-              <a:defRPr sz="1300">
-                <a:solidFill>
-                  <a:srgbClr val="1F2937"/>
-                </a:solidFill>
-              </a:defRPr>
-            </a:pPr>
-            <a:r>
-              <a:t>DTID: approved email DTID from intake</a:t>
-            </a:r>
-          </a:p>
-          <a:p>
-            <a:pPr>
-              <a:spcAft>
-                <a:spcPts val="300"/>
-              </a:spcAft>
-              <a:defRPr sz="1300" b="1">
-                <a:solidFill>
-                  <a:srgbClr val="005596"/>
-                </a:solidFill>
-              </a:defRPr>
-            </a:pPr>
-            <a:r>
-              <a:t>Correct format:</a:t>
-            </a:r>
-          </a:p>
-          <a:p>
-            <a:pPr>
-              <a:spcAft>
-                <a:spcPts val="300"/>
-              </a:spcAft>
-              <a:defRPr sz="1100">
-                <a:solidFill>
-                  <a:srgbClr val="008060"/>
-                </a:solidFill>
-                <a:latin typeface="Courier New"/>
-              </a:defRPr>
-            </a:pPr>
-            <a:r>
-              <a:t>URL?ccid=cc008317&amp;dtid=[dtid]&amp;utm_id=cc008317&amp;utm_medium=email&amp;utm_source=eloqua</a:t>
-            </a:r>
-          </a:p>
-          <a:p>
-            <a:pPr>
-              <a:spcAft>
-                <a:spcPts val="300"/>
-              </a:spcAft>
-              <a:defRPr sz="1300" b="1">
-                <a:solidFill>
-                  <a:srgbClr val="005596"/>
-                </a:solidFill>
-              </a:defRPr>
-            </a:pPr>
-            <a:r>
-              <a:t>Why it works:</a:t>
-            </a:r>
-          </a:p>
-          <a:p>
-            <a:pPr>
-              <a:spcAft>
-                <a:spcPts val="300"/>
-              </a:spcAft>
-              <a:defRPr sz="1300">
-                <a:solidFill>
-                  <a:srgbClr val="1F2937"/>
-                </a:solidFill>
-              </a:defRPr>
-            </a:pPr>
-            <a:r>
-              <a:t>Email does not require utm_creative</a:t>
-            </a:r>
-          </a:p>
-          <a:p>
-            <a:pPr>
-              <a:spcAft>
-                <a:spcPts val="300"/>
-              </a:spcAft>
-              <a:defRPr sz="1300">
-                <a:solidFill>
-                  <a:srgbClr val="1F2937"/>
-                </a:solidFill>
-              </a:defRPr>
-            </a:pPr>
-            <a:r>
-              <a:t>utm_source is an approved email platform</a:t>
-            </a:r>
-          </a:p>
-          <a:p>
-            <a:pPr>
-              <a:spcAft>
-                <a:spcPts val="300"/>
-              </a:spcAft>
-              <a:defRPr sz="1300">
-                <a:solidFill>
-                  <a:srgbClr val="1F2937"/>
-                </a:solidFill>
-              </a:defRPr>
-            </a:pPr>
-            <a:r>
-              <a:t>Empty or future-only parameters are omitted</a:t>
+              <a:t>Examples:</a:t>
+            </a:r>
+          </a:p>
+          <a:p>
+            <a:pPr>
+              <a:spcAft>
+                <a:spcPts val="300"/>
+              </a:spcAft>
+              <a:defRPr sz="1500">
+                <a:solidFill>
+                  <a:srgbClr val="1F2937"/>
+                </a:solidFill>
+              </a:defRPr>
+            </a:pPr>
+            <a:r>
+              <a:t>Email: eloqua, marketo, salesforce</a:t>
+            </a:r>
+          </a:p>
+          <a:p>
+            <a:pPr>
+              <a:spcAft>
+                <a:spcPts val="300"/>
+              </a:spcAft>
+              <a:defRPr sz="1500">
+                <a:solidFill>
+                  <a:srgbClr val="1F2937"/>
+                </a:solidFill>
+              </a:defRPr>
+            </a:pPr>
+            <a:r>
+              <a:t>Paid Direct: bloomberg, foundry, techtarget</a:t>
+            </a:r>
+          </a:p>
+          <a:p>
+            <a:pPr>
+              <a:spcAft>
+                <a:spcPts val="300"/>
+              </a:spcAft>
+              <a:defRPr sz="1500">
+                <a:solidFill>
+                  <a:srgbClr val="1F2937"/>
+                </a:solidFill>
+              </a:defRPr>
+            </a:pPr>
+            <a:r>
+              <a:t>Programmatic: dv360, youtube</a:t>
+            </a:r>
+          </a:p>
+          <a:p>
+            <a:pPr>
+              <a:spcAft>
+                <a:spcPts val="300"/>
+              </a:spcAft>
+              <a:defRPr sz="1500">
+                <a:solidFill>
+                  <a:srgbClr val="1F2937"/>
+                </a:solidFill>
+              </a:defRPr>
+            </a:pPr>
+            <a:r>
+              <a:t>Paid Social / Organic Social: linkedin, reddit, x, youtube</a:t>
+            </a:r>
+          </a:p>
+          <a:p>
+            <a:pPr>
+              <a:spcAft>
+                <a:spcPts val="300"/>
+              </a:spcAft>
+              <a:defRPr sz="1500">
+                <a:solidFill>
+                  <a:srgbClr val="1F2937"/>
+                </a:solidFill>
+              </a:defRPr>
+            </a:pPr>
+            <a:r>
+              <a:t>Paid Search: google, bing, baidu</a:t>
+            </a:r>
+          </a:p>
+          <a:p>
+            <a:pPr>
+              <a:spcAft>
+                <a:spcPts val="300"/>
+              </a:spcAft>
+              <a:defRPr sz="1500">
+                <a:solidFill>
+                  <a:srgbClr val="1F2937"/>
+                </a:solidFill>
+              </a:defRPr>
+            </a:pPr>
+            <a:r>
+              <a:t>Ratings and Reviews: g2, gartner, trustradius</a:t>
+            </a:r>
+          </a:p>
+          <a:p>
+            <a:pPr>
+              <a:spcAft>
+                <a:spcPts val="300"/>
+              </a:spcAft>
+              <a:defRPr sz="1500">
+                <a:solidFill>
+                  <a:srgbClr val="1F2937"/>
+                </a:solidFill>
+              </a:defRPr>
+            </a:pPr>
+            <a:r>
+              <a:t>Syndication: activate, technologyadvice, netline</a:t>
             </a:r>
           </a:p>
         </p:txBody>
@@ -6390,7 +6105,7 @@
               </a:defRPr>
             </a:pPr>
             <a:r>
-              <a:t>Facilitator note: The source document lists email source values but does not list email DTID values in the provided DTID table; keep DTID populated from approved intake/mapping data.</a:t>
+              <a:t>Facilitator note: A value can appear in more than one channel, such as foundry or trustradius; the combination of source and medium gives the reporting context.</a:t>
             </a:r>
           </a:p>
         </p:txBody>
@@ -6529,7 +6244,7 @@
               </a:defRPr>
             </a:pPr>
             <a:r>
-              <a:t>Incorrect examples and impacts</a:t>
+              <a:t>Channel-specific rules users often miss</a:t>
             </a:r>
           </a:p>
         </p:txBody>
@@ -6562,57 +6277,57 @@
               </a:spcAft>
               <a:defRPr sz="1300">
                 <a:solidFill>
-                  <a:srgbClr val="5C7080"/>
-                </a:solidFill>
-              </a:defRPr>
-            </a:pPr>
-            <a:r>
-              <a:t>Incorrect pattern | Impact</a:t>
-            </a:r>
-          </a:p>
-          <a:p>
-            <a:pPr>
+                  <a:srgbClr val="1F2937"/>
+                </a:solidFill>
+              </a:defRPr>
+            </a:pPr>
+            <a:r>
+              <a:t>Paid Programmatic:</a:t>
+            </a:r>
+          </a:p>
+          <a:p>
+            <a:pPr lvl="1">
               <a:spcAft>
                 <a:spcPts val="300"/>
               </a:spcAft>
               <a:defRPr sz="1300">
                 <a:solidFill>
-                  <a:srgbClr val="5C7080"/>
-                </a:solidFill>
-              </a:defRPr>
-            </a:pPr>
-            <a:r>
-              <a:t>utm_medium=Paid Social | Creates inconsistent channel classification</a:t>
-            </a:r>
-          </a:p>
-          <a:p>
-            <a:pPr>
+                  <a:srgbClr val="1F2937"/>
+                </a:solidFill>
+              </a:defRPr>
+            </a:pPr>
+            <a:r>
+              <a:t>Show only DV360 and YouTube in Workfront today.</a:t>
+            </a:r>
+          </a:p>
+          <a:p>
+            <a:pPr lvl="1">
               <a:spcAft>
                 <a:spcPts val="300"/>
               </a:spcAft>
               <a:defRPr sz="1300">
                 <a:solidFill>
-                  <a:srgbClr val="5C7080"/>
-                </a:solidFill>
-              </a:defRPr>
-            </a:pPr>
-            <a:r>
-              <a:t>utm_medium=social for paid social | Paid activity may report as organic social</a:t>
-            </a:r>
-          </a:p>
-          <a:p>
-            <a:pPr>
+                  <a:srgbClr val="1F2937"/>
+                </a:solidFill>
+              </a:defRPr>
+            </a:pPr>
+            <a:r>
+              <a:t>TradeDesk is reserved for future use and hidden in the UI.</a:t>
+            </a:r>
+          </a:p>
+          <a:p>
+            <a:pPr lvl="1">
               <a:spcAft>
                 <a:spcPts val="300"/>
               </a:spcAft>
               <a:defRPr sz="1300">
                 <a:solidFill>
-                  <a:srgbClr val="5C7080"/>
-                </a:solidFill>
-              </a:defRPr>
-            </a:pPr>
-            <a:r>
-              <a:t>utm_source=LinkedIn Ads | Splits platform reporting from approved linkedin</a:t>
+                  <a:srgbClr val="1F2937"/>
+                </a:solidFill>
+              </a:defRPr>
+            </a:pPr>
+            <a:r>
+              <a:t>Always append utm_creative=%ecid!.</a:t>
             </a:r>
           </a:p>
           <a:p>
@@ -6622,27 +6337,27 @@
               </a:spcAft>
               <a:defRPr sz="1300">
                 <a:solidFill>
-                  <a:srgbClr val="5C7080"/>
-                </a:solidFill>
-              </a:defRPr>
-            </a:pPr>
-            <a:r>
-              <a:t>utm_id=cc008318 while ccid=cc008317 | Campaign attribution mismatch</a:t>
-            </a:r>
-          </a:p>
-          <a:p>
-            <a:pPr>
+                  <a:srgbClr val="1F2937"/>
+                </a:solidFill>
+              </a:defRPr>
+            </a:pPr>
+            <a:r>
+              <a:t>Paid Direct, Paid Programmatic, Paid Social:</a:t>
+            </a:r>
+          </a:p>
+          <a:p>
+            <a:pPr lvl="1">
               <a:spcAft>
                 <a:spcPts val="300"/>
               </a:spcAft>
               <a:defRPr sz="1300">
                 <a:solidFill>
-                  <a:srgbClr val="5C7080"/>
-                </a:solidFill>
-              </a:defRPr>
-            </a:pPr>
-            <a:r>
-              <a:t>Missing utm_creative on Paid Direct | Creative-level attribution gap</a:t>
+                  <a:srgbClr val="1F2937"/>
+                </a:solidFill>
+              </a:defRPr>
+            </a:pPr>
+            <a:r>
+              <a:t>Require utm_creative=%ecid!.</a:t>
             </a:r>
           </a:p>
           <a:p>
@@ -6652,12 +6367,72 @@
               </a:spcAft>
               <a:defRPr sz="1300">
                 <a:solidFill>
-                  <a:srgbClr val="5C7080"/>
-                </a:solidFill>
-              </a:defRPr>
-            </a:pPr>
-            <a:r>
-              <a:t>Empty parameter like utm_campaign= | Adds noise; omit future-only or empty parameters</a:t>
+                  <a:srgbClr val="1F2937"/>
+                </a:solidFill>
+              </a:defRPr>
+            </a:pPr>
+            <a:r>
+              <a:t>Direct Mail:</a:t>
+            </a:r>
+          </a:p>
+          <a:p>
+            <a:pPr lvl="1">
+              <a:spcAft>
+                <a:spcPts val="300"/>
+              </a:spcAft>
+              <a:defRPr sz="1300">
+                <a:solidFill>
+                  <a:srgbClr val="1F2937"/>
+                </a:solidFill>
+              </a:defRPr>
+            </a:pPr>
+            <a:r>
+              <a:t>No approved utm_source list exists yet.</a:t>
+            </a:r>
+          </a:p>
+          <a:p>
+            <a:pPr lvl="1">
+              <a:spcAft>
+                <a:spcPts val="300"/>
+              </a:spcAft>
+              <a:defRPr sz="1300">
+                <a:solidFill>
+                  <a:srgbClr val="1F2937"/>
+                </a:solidFill>
+              </a:defRPr>
+            </a:pPr>
+            <a:r>
+              <a:t>Use lowercase and hyphens until standardized values are published.</a:t>
+            </a:r>
+          </a:p>
+          <a:p>
+            <a:pPr>
+              <a:spcAft>
+                <a:spcPts val="300"/>
+              </a:spcAft>
+              <a:defRPr sz="1300">
+                <a:solidFill>
+                  <a:srgbClr val="1F2937"/>
+                </a:solidFill>
+              </a:defRPr>
+            </a:pPr>
+            <a:r>
+              <a:t>Paid Direct legacy sources:</a:t>
+            </a:r>
+          </a:p>
+          <a:p>
+            <a:pPr lvl="1">
+              <a:spcAft>
+                <a:spcPts val="300"/>
+              </a:spcAft>
+              <a:defRPr sz="1300">
+                <a:solidFill>
+                  <a:srgbClr val="1F2937"/>
+                </a:solidFill>
+              </a:defRPr>
+            </a:pPr>
+            <a:r>
+              <a:t>Under review; do not add new activations using those values.</a:t>
             </a:r>
           </a:p>
         </p:txBody>
@@ -6711,7 +6486,7 @@
               </a:defRPr>
             </a:pPr>
             <a:r>
-              <a:t>Facilitator note: These are training examples based on the rules in the repository source.</a:t>
+              <a:t>Facilitator note: Users should not use legacy sources for new activations unless governance explicitly approves.</a:t>
             </a:r>
           </a:p>
         </p:txBody>
@@ -6850,21 +6625,75 @@
               </a:defRPr>
             </a:pPr>
             <a:r>
-              <a:t>User checklist before launch</a:t>
-            </a:r>
-          </a:p>
-        </p:txBody>
-      </p:sp>
-      <p:sp>
-        <p:nvSpPr>
-          <p:cNvPr id="4" name="TextBox 3"/>
+              <a:t>Precedence and persistence logic - FY27 edit slide</a:t>
+            </a:r>
+          </a:p>
+        </p:txBody>
+      </p:sp>
+      <p:sp>
+        <p:nvSpPr>
+          <p:cNvPr id="4" name="Rounded Rectangle 3"/>
+          <p:cNvSpPr/>
+          <p:nvPr/>
+        </p:nvSpPr>
+        <p:spPr>
+          <a:xfrm>
+            <a:off x="658368" y="1078992"/>
+            <a:ext cx="10881360" cy="594360"/>
+          </a:xfrm>
+          <a:prstGeom prst="roundRect">
+            <a:avLst/>
+          </a:prstGeom>
+          <a:solidFill>
+            <a:srgbClr val="E2F0FA"/>
+          </a:solidFill>
+          <a:ln>
+            <a:solidFill>
+              <a:srgbClr val="005596"/>
+            </a:solidFill>
+          </a:ln>
+        </p:spPr>
+        <p:style>
+          <a:lnRef idx="1">
+            <a:schemeClr val="accent1"/>
+          </a:lnRef>
+          <a:fillRef idx="3">
+            <a:schemeClr val="accent1"/>
+          </a:fillRef>
+          <a:effectRef idx="2">
+            <a:schemeClr val="accent1"/>
+          </a:effectRef>
+          <a:fontRef idx="minor">
+            <a:schemeClr val="lt1"/>
+          </a:fontRef>
+        </p:style>
+        <p:txBody>
+          <a:bodyPr rtlCol="0" anchor="ctr"/>
+          <a:lstStyle/>
+          <a:p>
+            <a:pPr algn="ctr">
+              <a:defRPr b="1" sz="1300">
+                <a:solidFill>
+                  <a:srgbClr val="005596"/>
+                </a:solidFill>
+              </a:defRPr>
+            </a:pPr>
+            <a:r>
+              <a:t>Key repository-backed rule: utm_medium is the highest-priority channel classification input.</a:t>
+            </a:r>
+          </a:p>
+        </p:txBody>
+      </p:sp>
+      <p:sp>
+        <p:nvSpPr>
+          <p:cNvPr id="5" name="TextBox 4"/>
           <p:cNvSpPr txBox="1"/>
           <p:nvPr/>
         </p:nvSpPr>
         <p:spPr>
           <a:xfrm>
-            <a:off x="658368" y="1143000"/>
-            <a:ext cx="10881360" cy="4526280"/>
+            <a:off x="658368" y="1828800"/>
+            <a:ext cx="10881360" cy="3703320"/>
           </a:xfrm>
           <a:prstGeom prst="rect">
             <a:avLst/>
@@ -6888,7 +6717,7 @@
               </a:defRPr>
             </a:pPr>
             <a:r>
-              <a:t>Before a URL is used, confirm:</a:t>
+              <a:t>Training implication:</a:t>
             </a:r>
           </a:p>
           <a:p>
@@ -6903,7 +6732,7 @@
               </a:defRPr>
             </a:pPr>
             <a:r>
-              <a:t>The build path is correct: Workfront, Stensul, or Manual URL Builder.</a:t>
+              <a:t>If utm_medium is missing, inconsistent, or manually changed, channel reporting can be misclassified.</a:t>
             </a:r>
           </a:p>
           <a:p>
@@ -6918,7 +6747,7 @@
               </a:defRPr>
             </a:pPr>
             <a:r>
-              <a:t>ccid, dtid, utm_id, utm_medium, and utm_source are present.</a:t>
+              <a:t>If utm_source does not match the selected channel context, vendor/platform reporting can be split or incorrectly grouped.</a:t>
             </a:r>
           </a:p>
           <a:p>
@@ -6933,7 +6762,22 @@
               </a:defRPr>
             </a:pPr>
             <a:r>
-              <a:t>utm_id exactly matches ccid.</a:t>
+              <a:t>If persisted values are retained downstream, early mistakes may continue to affect reporting until corrected.</a:t>
+            </a:r>
+          </a:p>
+          <a:p>
+            <a:pPr>
+              <a:spcAft>
+                <a:spcPts val="300"/>
+              </a:spcAft>
+              <a:defRPr sz="1500" b="1">
+                <a:solidFill>
+                  <a:srgbClr val="005596"/>
+                </a:solidFill>
+              </a:defRPr>
+            </a:pPr>
+            <a:r>
+              <a:t>FY27 owner edits:</a:t>
             </a:r>
           </a:p>
           <a:p>
@@ -6948,7 +6792,7 @@
               </a:defRPr>
             </a:pPr>
             <a:r>
-              <a:t>utm_medium is one of the approved values.</a:t>
+              <a:t>Add the current FY27 precedence order here.</a:t>
             </a:r>
           </a:p>
           <a:p>
@@ -6963,7 +6807,7 @@
               </a:defRPr>
             </a:pPr>
             <a:r>
-              <a:t>utm_source is approved for the channel.</a:t>
+              <a:t>Add the current FY27 persistence rules here.</a:t>
             </a:r>
           </a:p>
           <a:p>
@@ -6978,44 +6822,14 @@
               </a:defRPr>
             </a:pPr>
             <a:r>
-              <a:t>utm_creative=%ecid! is included only when required.</a:t>
-            </a:r>
-          </a:p>
-          <a:p>
-            <a:pPr>
-              <a:spcAft>
-                <a:spcPts val="300"/>
-              </a:spcAft>
-              <a:defRPr sz="1500">
-                <a:solidFill>
-                  <a:srgbClr val="1F2937"/>
-                </a:solidFill>
-              </a:defRPr>
-            </a:pPr>
-            <a:r>
-              <a:t>Values are lowercase and hyphenated.</a:t>
-            </a:r>
-          </a:p>
-          <a:p>
-            <a:pPr>
-              <a:spcAft>
-                <a:spcPts val="300"/>
-              </a:spcAft>
-              <a:defRPr sz="1500">
-                <a:solidFill>
-                  <a:srgbClr val="1F2937"/>
-                </a:solidFill>
-              </a:defRPr>
-            </a:pPr>
-            <a:r>
-              <a:t>Empty parameters are omitted.</a:t>
-            </a:r>
-          </a:p>
-        </p:txBody>
-      </p:sp>
-      <p:sp>
-        <p:nvSpPr>
-          <p:cNvPr id="5" name="Rounded Rectangle 4"/>
+              <a:t>Add any exceptions by channel, tool, or reporting surface here.</a:t>
+            </a:r>
+          </a:p>
+        </p:txBody>
+      </p:sp>
+      <p:sp>
+        <p:nvSpPr>
+          <p:cNvPr id="6" name="Rounded Rectangle 5"/>
           <p:cNvSpPr/>
           <p:nvPr/>
         </p:nvSpPr>
@@ -7062,14 +6876,14 @@
               </a:defRPr>
             </a:pPr>
             <a:r>
-              <a:t>Facilitator note: This can become a one-page job aid for launch readiness.</a:t>
-            </a:r>
-          </a:p>
-        </p:txBody>
-      </p:sp>
-      <p:sp>
-        <p:nvSpPr>
-          <p:cNvPr id="6" name="TextBox 5"/>
+              <a:t>Facilitator note: The repository does not include the full FY27 persistence specification. Keep this slide as the update point when that logic is finalized.</a:t>
+            </a:r>
+          </a:p>
+        </p:txBody>
+      </p:sp>
+      <p:sp>
+        <p:nvSpPr>
+          <p:cNvPr id="7" name="TextBox 6"/>
           <p:cNvSpPr txBox="1"/>
           <p:nvPr/>
         </p:nvSpPr>
@@ -7507,21 +7321,75 @@
               </a:defRPr>
             </a:pPr>
             <a:r>
-              <a:t>Where to go for updates</a:t>
-            </a:r>
-          </a:p>
-        </p:txBody>
-      </p:sp>
-      <p:sp>
-        <p:nvSpPr>
-          <p:cNvPr id="4" name="TextBox 3"/>
+              <a:t>What happens when tagging is wrong</a:t>
+            </a:r>
+          </a:p>
+        </p:txBody>
+      </p:sp>
+      <p:sp>
+        <p:nvSpPr>
+          <p:cNvPr id="4" name="Rounded Rectangle 3"/>
+          <p:cNvSpPr/>
+          <p:nvPr/>
+        </p:nvSpPr>
+        <p:spPr>
+          <a:xfrm>
+            <a:off x="658368" y="1097280"/>
+            <a:ext cx="10881360" cy="530352"/>
+          </a:xfrm>
+          <a:prstGeom prst="roundRect">
+            <a:avLst/>
+          </a:prstGeom>
+          <a:solidFill>
+            <a:srgbClr val="FFF3E0"/>
+          </a:solidFill>
+          <a:ln>
+            <a:solidFill>
+              <a:srgbClr val="D67800"/>
+            </a:solidFill>
+          </a:ln>
+        </p:spPr>
+        <p:style>
+          <a:lnRef idx="1">
+            <a:schemeClr val="accent1"/>
+          </a:lnRef>
+          <a:fillRef idx="3">
+            <a:schemeClr val="accent1"/>
+          </a:fillRef>
+          <a:effectRef idx="2">
+            <a:schemeClr val="accent1"/>
+          </a:effectRef>
+          <a:fontRef idx="minor">
+            <a:schemeClr val="lt1"/>
+          </a:fontRef>
+        </p:style>
+        <p:txBody>
+          <a:bodyPr rtlCol="0" anchor="ctr"/>
+          <a:lstStyle/>
+          <a:p>
+            <a:pPr algn="ctr">
+              <a:defRPr b="1" sz="1300">
+                <a:solidFill>
+                  <a:srgbClr val="D67800"/>
+                </a:solidFill>
+              </a:defRPr>
+            </a:pPr>
+            <a:r>
+              <a:t>Bad tags create bad data; bad data drives the wrong optimization decisions.</a:t>
+            </a:r>
+          </a:p>
+        </p:txBody>
+      </p:sp>
+      <p:sp>
+        <p:nvSpPr>
+          <p:cNvPr id="5" name="TextBox 4"/>
           <p:cNvSpPr txBox="1"/>
           <p:nvPr/>
         </p:nvSpPr>
         <p:spPr>
           <a:xfrm>
-            <a:off x="658368" y="1143000"/>
-            <a:ext cx="10881360" cy="4526280"/>
+            <a:off x="658368" y="1783080"/>
+            <a:ext cx="10881360" cy="3749039"/>
           </a:xfrm>
           <a:prstGeom prst="rect">
             <a:avLst/>
@@ -7545,7 +7413,7 @@
               </a:defRPr>
             </a:pPr>
             <a:r>
-              <a:t>Workfront intake mappings: Source and Mediums.xlsx</a:t>
+              <a:t>Campaign activity to be disconnected from the system of record</a:t>
             </a:r>
           </a:p>
           <a:p>
@@ -7560,7 +7428,7 @@
               </a:defRPr>
             </a:pPr>
             <a:r>
-              <a:t>Repository source document: UTM Framework New Training.md</a:t>
+              <a:t>utm_id and ccid mismatch, breaking campaign-level attribution</a:t>
             </a:r>
           </a:p>
           <a:p>
@@ -7575,7 +7443,7 @@
               </a:defRPr>
             </a:pPr>
             <a:r>
-              <a:t>Generated training deck: FY27 Tagging and Tracking Training Deck.pptx</a:t>
+              <a:t>Channel misclassification when utm_medium is wrong</a:t>
             </a:r>
           </a:p>
           <a:p>
@@ -7590,22 +7458,7 @@
               </a:defRPr>
             </a:pPr>
             <a:r>
-              <a:t>Editable deck source: FY27 Tagging and Tracking Training Deck.md</a:t>
-            </a:r>
-          </a:p>
-          <a:p>
-            <a:pPr>
-              <a:spcAft>
-                <a:spcPts val="300"/>
-              </a:spcAft>
-              <a:defRPr sz="1500" b="1">
-                <a:solidFill>
-                  <a:srgbClr val="005596"/>
-                </a:solidFill>
-              </a:defRPr>
-            </a:pPr>
-            <a:r>
-              <a:t>Open items for FY27:</a:t>
+              <a:t>Vendor/platform reporting errors when utm_source is wrong</a:t>
             </a:r>
           </a:p>
           <a:p>
@@ -7620,7 +7473,7 @@
               </a:defRPr>
             </a:pPr>
             <a:r>
-              <a:t>Confirm final precedence order.</a:t>
+              <a:t>Creative reporting gaps when required utm_creative is missing</a:t>
             </a:r>
           </a:p>
           <a:p>
@@ -7635,7 +7488,7 @@
               </a:defRPr>
             </a:pPr>
             <a:r>
-              <a:t>Confirm final persistence behavior by reporting surface.</a:t>
+              <a:t>Duplicate reporting buckets caused by capitalization, spaces, or local naming variants</a:t>
             </a:r>
           </a:p>
           <a:p>
@@ -7650,29 +7503,14 @@
               </a:defRPr>
             </a:pPr>
             <a:r>
-              <a:t>Confirm when CCID/DTID retirement criteria are met.</a:t>
-            </a:r>
-          </a:p>
-          <a:p>
-            <a:pPr>
-              <a:spcAft>
-                <a:spcPts val="300"/>
-              </a:spcAft>
-              <a:defRPr sz="1500">
-                <a:solidFill>
-                  <a:srgbClr val="1F2937"/>
-                </a:solidFill>
-              </a:defRPr>
-            </a:pPr>
-            <a:r>
-              <a:t>Confirm any new approved utm_source values.</a:t>
-            </a:r>
-          </a:p>
-        </p:txBody>
-      </p:sp>
-      <p:sp>
-        <p:nvSpPr>
-          <p:cNvPr id="5" name="Rounded Rectangle 4"/>
+              <a:t>Cleanup work for Marketing Operations, Analytics, and Workfront teams</a:t>
+            </a:r>
+          </a:p>
+        </p:txBody>
+      </p:sp>
+      <p:sp>
+        <p:nvSpPr>
+          <p:cNvPr id="6" name="Rounded Rectangle 5"/>
           <p:cNvSpPr/>
           <p:nvPr/>
         </p:nvSpPr>
@@ -7719,14 +7557,14 @@
               </a:defRPr>
             </a:pPr>
             <a:r>
-              <a:t>Facilitator note: If governance changes, update the source Markdown and regenerate the PPTX so the repository remains the training source of truth.</a:t>
-            </a:r>
-          </a:p>
-        </p:txBody>
-      </p:sp>
-      <p:sp>
-        <p:nvSpPr>
-          <p:cNvPr id="6" name="TextBox 5"/>
+              <a:t>Facilitator note: Anchor this in business impact: bad tags create bad data, and bad data drives the wrong optimization decisions.</a:t>
+            </a:r>
+          </a:p>
+        </p:txBody>
+      </p:sp>
+      <p:sp>
+        <p:nvSpPr>
+          <p:cNvPr id="7" name="TextBox 6"/>
           <p:cNvSpPr txBox="1"/>
           <p:nvPr/>
         </p:nvSpPr>
@@ -7755,6 +7593,1883 @@
             </a:pPr>
             <a:r>
               <a:t>FY27 Tagging and Tracking Training | Repository-backed draft | Slide 20</a:t>
+            </a:r>
+          </a:p>
+        </p:txBody>
+      </p:sp>
+    </p:spTree>
+  </p:cSld>
+  <p:clrMapOvr>
+    <a:masterClrMapping/>
+  </p:clrMapOvr>
+</p:sld>
+</file>
+
+<file path=ppt/slides/slide21.xml><?xml version="1.0" encoding="utf-8"?>
+<p:sld xmlns:a="http://schemas.openxmlformats.org/drawingml/2006/main" xmlns:p="http://schemas.openxmlformats.org/presentationml/2006/main" xmlns:r="http://schemas.openxmlformats.org/officeDocument/2006/relationships">
+  <p:cSld>
+    <p:bg>
+      <p:bgPr>
+        <a:solidFill>
+          <a:srgbClr val="FFFFFF"/>
+        </a:solidFill>
+        <a:effectLst/>
+      </p:bgPr>
+    </p:bg>
+    <p:spTree>
+      <p:nvGrpSpPr>
+        <p:cNvPr id="1" name=""/>
+        <p:cNvGrpSpPr/>
+        <p:nvPr/>
+      </p:nvGrpSpPr>
+      <p:grpSpPr/>
+      <p:sp>
+        <p:nvSpPr>
+          <p:cNvPr id="2" name="Rectangle 1"/>
+          <p:cNvSpPr/>
+          <p:nvPr/>
+        </p:nvSpPr>
+        <p:spPr>
+          <a:xfrm>
+            <a:off x="0" y="0"/>
+            <a:ext cx="12191695" cy="164592"/>
+          </a:xfrm>
+          <a:prstGeom prst="rect">
+            <a:avLst/>
+          </a:prstGeom>
+          <a:solidFill>
+            <a:srgbClr val="005596"/>
+          </a:solidFill>
+          <a:ln>
+            <a:noFill/>
+          </a:ln>
+        </p:spPr>
+        <p:style>
+          <a:lnRef idx="1">
+            <a:schemeClr val="accent1"/>
+          </a:lnRef>
+          <a:fillRef idx="3">
+            <a:schemeClr val="accent1"/>
+          </a:fillRef>
+          <a:effectRef idx="2">
+            <a:schemeClr val="accent1"/>
+          </a:effectRef>
+          <a:fontRef idx="minor">
+            <a:schemeClr val="lt1"/>
+          </a:fontRef>
+        </p:style>
+        <p:txBody>
+          <a:bodyPr rtlCol="0" anchor="ctr"/>
+          <a:lstStyle/>
+          <a:p>
+            <a:pPr algn="ctr"/>
+          </a:p>
+        </p:txBody>
+      </p:sp>
+      <p:sp>
+        <p:nvSpPr>
+          <p:cNvPr id="3" name="TextBox 2"/>
+          <p:cNvSpPr txBox="1"/>
+          <p:nvPr/>
+        </p:nvSpPr>
+        <p:spPr>
+          <a:xfrm>
+            <a:off x="502920" y="347472"/>
+            <a:ext cx="10972800" cy="594360"/>
+          </a:xfrm>
+          <a:prstGeom prst="rect">
+            <a:avLst/>
+          </a:prstGeom>
+          <a:noFill/>
+        </p:spPr>
+        <p:txBody>
+          <a:bodyPr wrap="none">
+            <a:spAutoFit/>
+          </a:bodyPr>
+          <a:lstStyle/>
+          <a:p>
+            <a:pPr>
+              <a:defRPr b="1" sz="2800">
+                <a:solidFill>
+                  <a:srgbClr val="005596"/>
+                </a:solidFill>
+              </a:defRPr>
+            </a:pPr>
+            <a:r>
+              <a:t>Example - correct paid social URL</a:t>
+            </a:r>
+          </a:p>
+        </p:txBody>
+      </p:sp>
+      <p:sp>
+        <p:nvSpPr>
+          <p:cNvPr id="4" name="TextBox 3"/>
+          <p:cNvSpPr txBox="1"/>
+          <p:nvPr/>
+        </p:nvSpPr>
+        <p:spPr>
+          <a:xfrm>
+            <a:off x="658368" y="1143000"/>
+            <a:ext cx="10881360" cy="4526280"/>
+          </a:xfrm>
+          <a:prstGeom prst="rect">
+            <a:avLst/>
+          </a:prstGeom>
+          <a:noFill/>
+        </p:spPr>
+        <p:txBody>
+          <a:bodyPr wrap="square" lIns="73152" rIns="73152" bIns="27432">
+            <a:spAutoFit/>
+          </a:bodyPr>
+          <a:lstStyle/>
+          <a:p>
+            <a:pPr>
+              <a:spcAft>
+                <a:spcPts val="300"/>
+              </a:spcAft>
+              <a:defRPr sz="1300" b="1">
+                <a:solidFill>
+                  <a:srgbClr val="005596"/>
+                </a:solidFill>
+              </a:defRPr>
+            </a:pPr>
+            <a:r>
+              <a:t>Scenario:</a:t>
+            </a:r>
+          </a:p>
+          <a:p>
+            <a:pPr>
+              <a:spcAft>
+                <a:spcPts val="300"/>
+              </a:spcAft>
+              <a:defRPr sz="1300">
+                <a:solidFill>
+                  <a:srgbClr val="1F2937"/>
+                </a:solidFill>
+              </a:defRPr>
+            </a:pPr>
+            <a:r>
+              <a:t>Channel: Paid Social</a:t>
+            </a:r>
+          </a:p>
+          <a:p>
+            <a:pPr>
+              <a:spcAft>
+                <a:spcPts val="300"/>
+              </a:spcAft>
+              <a:defRPr sz="1300">
+                <a:solidFill>
+                  <a:srgbClr val="1F2937"/>
+                </a:solidFill>
+              </a:defRPr>
+            </a:pPr>
+            <a:r>
+              <a:t>Platform: LinkedIn</a:t>
+            </a:r>
+          </a:p>
+          <a:p>
+            <a:pPr>
+              <a:spcAft>
+                <a:spcPts val="300"/>
+              </a:spcAft>
+              <a:defRPr sz="1300">
+                <a:solidFill>
+                  <a:srgbClr val="1F2937"/>
+                </a:solidFill>
+              </a:defRPr>
+            </a:pPr>
+            <a:r>
+              <a:t>CCID: cc008317</a:t>
+            </a:r>
+          </a:p>
+          <a:p>
+            <a:pPr>
+              <a:spcAft>
+                <a:spcPts val="300"/>
+              </a:spcAft>
+              <a:defRPr sz="1300">
+                <a:solidFill>
+                  <a:srgbClr val="1F2937"/>
+                </a:solidFill>
+              </a:defRPr>
+            </a:pPr>
+            <a:r>
+              <a:t>DTID: ppdllin001650</a:t>
+            </a:r>
+          </a:p>
+          <a:p>
+            <a:pPr>
+              <a:spcAft>
+                <a:spcPts val="300"/>
+              </a:spcAft>
+              <a:defRPr sz="1300" b="1">
+                <a:solidFill>
+                  <a:srgbClr val="005596"/>
+                </a:solidFill>
+              </a:defRPr>
+            </a:pPr>
+            <a:r>
+              <a:t>Correct format:</a:t>
+            </a:r>
+          </a:p>
+          <a:p>
+            <a:pPr>
+              <a:spcAft>
+                <a:spcPts val="300"/>
+              </a:spcAft>
+              <a:defRPr sz="1100">
+                <a:solidFill>
+                  <a:srgbClr val="008060"/>
+                </a:solidFill>
+                <a:latin typeface="Courier New"/>
+              </a:defRPr>
+            </a:pPr>
+            <a:r>
+              <a:t>URL?ccid=cc008317&amp;dtid=ppdllin001650&amp;utm_id=cc008317&amp;utm_medium=paid-social&amp;utm_source=linkedin&amp;utm_creative=%ecid!</a:t>
+            </a:r>
+          </a:p>
+          <a:p>
+            <a:pPr>
+              <a:spcAft>
+                <a:spcPts val="300"/>
+              </a:spcAft>
+              <a:defRPr sz="1300" b="1">
+                <a:solidFill>
+                  <a:srgbClr val="005596"/>
+                </a:solidFill>
+              </a:defRPr>
+            </a:pPr>
+            <a:r>
+              <a:t>Why it works:</a:t>
+            </a:r>
+          </a:p>
+          <a:p>
+            <a:pPr>
+              <a:spcAft>
+                <a:spcPts val="300"/>
+              </a:spcAft>
+              <a:defRPr sz="1300">
+                <a:solidFill>
+                  <a:srgbClr val="1F2937"/>
+                </a:solidFill>
+              </a:defRPr>
+            </a:pPr>
+            <a:r>
+              <a:t>utm_id equals ccid</a:t>
+            </a:r>
+          </a:p>
+          <a:p>
+            <a:pPr>
+              <a:spcAft>
+                <a:spcPts val="300"/>
+              </a:spcAft>
+              <a:defRPr sz="1300">
+                <a:solidFill>
+                  <a:srgbClr val="1F2937"/>
+                </a:solidFill>
+              </a:defRPr>
+            </a:pPr>
+            <a:r>
+              <a:t>utm_medium uses approved channel value</a:t>
+            </a:r>
+          </a:p>
+          <a:p>
+            <a:pPr>
+              <a:spcAft>
+                <a:spcPts val="300"/>
+              </a:spcAft>
+              <a:defRPr sz="1300">
+                <a:solidFill>
+                  <a:srgbClr val="1F2937"/>
+                </a:solidFill>
+              </a:defRPr>
+            </a:pPr>
+            <a:r>
+              <a:t>utm_source uses approved social platform value</a:t>
+            </a:r>
+          </a:p>
+          <a:p>
+            <a:pPr>
+              <a:spcAft>
+                <a:spcPts val="300"/>
+              </a:spcAft>
+              <a:defRPr sz="1300">
+                <a:solidFill>
+                  <a:srgbClr val="1F2937"/>
+                </a:solidFill>
+              </a:defRPr>
+            </a:pPr>
+            <a:r>
+              <a:t>utm_creative is included because Paid Social requires it</a:t>
+            </a:r>
+          </a:p>
+        </p:txBody>
+      </p:sp>
+      <p:sp>
+        <p:nvSpPr>
+          <p:cNvPr id="5" name="Rounded Rectangle 4"/>
+          <p:cNvSpPr/>
+          <p:nvPr/>
+        </p:nvSpPr>
+        <p:spPr>
+          <a:xfrm>
+            <a:off x="658368" y="5687568"/>
+            <a:ext cx="10881360" cy="658368"/>
+          </a:xfrm>
+          <a:prstGeom prst="roundRect">
+            <a:avLst/>
+          </a:prstGeom>
+          <a:solidFill>
+            <a:srgbClr val="F5F8FB"/>
+          </a:solidFill>
+          <a:ln>
+            <a:solidFill>
+              <a:srgbClr val="E2F0FA"/>
+            </a:solidFill>
+          </a:ln>
+        </p:spPr>
+        <p:style>
+          <a:lnRef idx="1">
+            <a:schemeClr val="accent1"/>
+          </a:lnRef>
+          <a:fillRef idx="3">
+            <a:schemeClr val="accent1"/>
+          </a:fillRef>
+          <a:effectRef idx="2">
+            <a:schemeClr val="accent1"/>
+          </a:effectRef>
+          <a:fontRef idx="minor">
+            <a:schemeClr val="lt1"/>
+          </a:fontRef>
+        </p:style>
+        <p:txBody>
+          <a:bodyPr rtlCol="0" anchor="ctr"/>
+          <a:lstStyle/>
+          <a:p>
+            <a:pPr algn="ctr">
+              <a:defRPr sz="900">
+                <a:solidFill>
+                  <a:srgbClr val="5C7080"/>
+                </a:solidFill>
+              </a:defRPr>
+            </a:pPr>
+            <a:r>
+              <a:t>Facilitator note: Use this as the walkthrough example for query-string order and conditional creative tagging.</a:t>
+            </a:r>
+          </a:p>
+        </p:txBody>
+      </p:sp>
+      <p:sp>
+        <p:nvSpPr>
+          <p:cNvPr id="6" name="TextBox 5"/>
+          <p:cNvSpPr txBox="1"/>
+          <p:nvPr/>
+        </p:nvSpPr>
+        <p:spPr>
+          <a:xfrm>
+            <a:off x="411480" y="6510528"/>
+            <a:ext cx="11384280" cy="201168"/>
+          </a:xfrm>
+          <a:prstGeom prst="rect">
+            <a:avLst/>
+          </a:prstGeom>
+          <a:noFill/>
+        </p:spPr>
+        <p:txBody>
+          <a:bodyPr wrap="none">
+            <a:spAutoFit/>
+          </a:bodyPr>
+          <a:lstStyle/>
+          <a:p>
+            <a:pPr algn="r">
+              <a:defRPr sz="700">
+                <a:solidFill>
+                  <a:srgbClr val="5C7080"/>
+                </a:solidFill>
+              </a:defRPr>
+            </a:pPr>
+            <a:r>
+              <a:t>FY27 Tagging and Tracking Training | Repository-backed draft | Slide 21</a:t>
+            </a:r>
+          </a:p>
+        </p:txBody>
+      </p:sp>
+    </p:spTree>
+  </p:cSld>
+  <p:clrMapOvr>
+    <a:masterClrMapping/>
+  </p:clrMapOvr>
+</p:sld>
+</file>
+
+<file path=ppt/slides/slide22.xml><?xml version="1.0" encoding="utf-8"?>
+<p:sld xmlns:a="http://schemas.openxmlformats.org/drawingml/2006/main" xmlns:p="http://schemas.openxmlformats.org/presentationml/2006/main" xmlns:r="http://schemas.openxmlformats.org/officeDocument/2006/relationships">
+  <p:cSld>
+    <p:bg>
+      <p:bgPr>
+        <a:solidFill>
+          <a:srgbClr val="FFFFFF"/>
+        </a:solidFill>
+        <a:effectLst/>
+      </p:bgPr>
+    </p:bg>
+    <p:spTree>
+      <p:nvGrpSpPr>
+        <p:cNvPr id="1" name=""/>
+        <p:cNvGrpSpPr/>
+        <p:nvPr/>
+      </p:nvGrpSpPr>
+      <p:grpSpPr/>
+      <p:sp>
+        <p:nvSpPr>
+          <p:cNvPr id="2" name="Rectangle 1"/>
+          <p:cNvSpPr/>
+          <p:nvPr/>
+        </p:nvSpPr>
+        <p:spPr>
+          <a:xfrm>
+            <a:off x="0" y="0"/>
+            <a:ext cx="12191695" cy="164592"/>
+          </a:xfrm>
+          <a:prstGeom prst="rect">
+            <a:avLst/>
+          </a:prstGeom>
+          <a:solidFill>
+            <a:srgbClr val="005596"/>
+          </a:solidFill>
+          <a:ln>
+            <a:noFill/>
+          </a:ln>
+        </p:spPr>
+        <p:style>
+          <a:lnRef idx="1">
+            <a:schemeClr val="accent1"/>
+          </a:lnRef>
+          <a:fillRef idx="3">
+            <a:schemeClr val="accent1"/>
+          </a:fillRef>
+          <a:effectRef idx="2">
+            <a:schemeClr val="accent1"/>
+          </a:effectRef>
+          <a:fontRef idx="minor">
+            <a:schemeClr val="lt1"/>
+          </a:fontRef>
+        </p:style>
+        <p:txBody>
+          <a:bodyPr rtlCol="0" anchor="ctr"/>
+          <a:lstStyle/>
+          <a:p>
+            <a:pPr algn="ctr"/>
+          </a:p>
+        </p:txBody>
+      </p:sp>
+      <p:sp>
+        <p:nvSpPr>
+          <p:cNvPr id="3" name="TextBox 2"/>
+          <p:cNvSpPr txBox="1"/>
+          <p:nvPr/>
+        </p:nvSpPr>
+        <p:spPr>
+          <a:xfrm>
+            <a:off x="502920" y="347472"/>
+            <a:ext cx="10972800" cy="594360"/>
+          </a:xfrm>
+          <a:prstGeom prst="rect">
+            <a:avLst/>
+          </a:prstGeom>
+          <a:noFill/>
+        </p:spPr>
+        <p:txBody>
+          <a:bodyPr wrap="none">
+            <a:spAutoFit/>
+          </a:bodyPr>
+          <a:lstStyle/>
+          <a:p>
+            <a:pPr>
+              <a:defRPr b="1" sz="2800">
+                <a:solidFill>
+                  <a:srgbClr val="005596"/>
+                </a:solidFill>
+              </a:defRPr>
+            </a:pPr>
+            <a:r>
+              <a:t>Example - correct email URL</a:t>
+            </a:r>
+          </a:p>
+        </p:txBody>
+      </p:sp>
+      <p:sp>
+        <p:nvSpPr>
+          <p:cNvPr id="4" name="TextBox 3"/>
+          <p:cNvSpPr txBox="1"/>
+          <p:nvPr/>
+        </p:nvSpPr>
+        <p:spPr>
+          <a:xfrm>
+            <a:off x="658368" y="1143000"/>
+            <a:ext cx="10881360" cy="4526280"/>
+          </a:xfrm>
+          <a:prstGeom prst="rect">
+            <a:avLst/>
+          </a:prstGeom>
+          <a:noFill/>
+        </p:spPr>
+        <p:txBody>
+          <a:bodyPr wrap="square" lIns="73152" rIns="73152" bIns="27432">
+            <a:spAutoFit/>
+          </a:bodyPr>
+          <a:lstStyle/>
+          <a:p>
+            <a:pPr>
+              <a:spcAft>
+                <a:spcPts val="300"/>
+              </a:spcAft>
+              <a:defRPr sz="1300" b="1">
+                <a:solidFill>
+                  <a:srgbClr val="005596"/>
+                </a:solidFill>
+              </a:defRPr>
+            </a:pPr>
+            <a:r>
+              <a:t>Scenario:</a:t>
+            </a:r>
+          </a:p>
+          <a:p>
+            <a:pPr>
+              <a:spcAft>
+                <a:spcPts val="300"/>
+              </a:spcAft>
+              <a:defRPr sz="1300">
+                <a:solidFill>
+                  <a:srgbClr val="1F2937"/>
+                </a:solidFill>
+              </a:defRPr>
+            </a:pPr>
+            <a:r>
+              <a:t>Channel: Email</a:t>
+            </a:r>
+          </a:p>
+          <a:p>
+            <a:pPr>
+              <a:spcAft>
+                <a:spcPts val="300"/>
+              </a:spcAft>
+              <a:defRPr sz="1300">
+                <a:solidFill>
+                  <a:srgbClr val="1F2937"/>
+                </a:solidFill>
+              </a:defRPr>
+            </a:pPr>
+            <a:r>
+              <a:t>Platform: Eloqua</a:t>
+            </a:r>
+          </a:p>
+          <a:p>
+            <a:pPr>
+              <a:spcAft>
+                <a:spcPts val="300"/>
+              </a:spcAft>
+              <a:defRPr sz="1300">
+                <a:solidFill>
+                  <a:srgbClr val="1F2937"/>
+                </a:solidFill>
+              </a:defRPr>
+            </a:pPr>
+            <a:r>
+              <a:t>CCID: cc008317</a:t>
+            </a:r>
+          </a:p>
+          <a:p>
+            <a:pPr>
+              <a:spcAft>
+                <a:spcPts val="300"/>
+              </a:spcAft>
+              <a:defRPr sz="1300">
+                <a:solidFill>
+                  <a:srgbClr val="1F2937"/>
+                </a:solidFill>
+              </a:defRPr>
+            </a:pPr>
+            <a:r>
+              <a:t>DTID: approved email DTID from intake</a:t>
+            </a:r>
+          </a:p>
+          <a:p>
+            <a:pPr>
+              <a:spcAft>
+                <a:spcPts val="300"/>
+              </a:spcAft>
+              <a:defRPr sz="1300" b="1">
+                <a:solidFill>
+                  <a:srgbClr val="005596"/>
+                </a:solidFill>
+              </a:defRPr>
+            </a:pPr>
+            <a:r>
+              <a:t>Correct format:</a:t>
+            </a:r>
+          </a:p>
+          <a:p>
+            <a:pPr>
+              <a:spcAft>
+                <a:spcPts val="300"/>
+              </a:spcAft>
+              <a:defRPr sz="1100">
+                <a:solidFill>
+                  <a:srgbClr val="008060"/>
+                </a:solidFill>
+                <a:latin typeface="Courier New"/>
+              </a:defRPr>
+            </a:pPr>
+            <a:r>
+              <a:t>URL?ccid=cc008317&amp;dtid=[dtid]&amp;utm_id=cc008317&amp;utm_medium=email&amp;utm_source=eloqua</a:t>
+            </a:r>
+          </a:p>
+          <a:p>
+            <a:pPr>
+              <a:spcAft>
+                <a:spcPts val="300"/>
+              </a:spcAft>
+              <a:defRPr sz="1300" b="1">
+                <a:solidFill>
+                  <a:srgbClr val="005596"/>
+                </a:solidFill>
+              </a:defRPr>
+            </a:pPr>
+            <a:r>
+              <a:t>Why it works:</a:t>
+            </a:r>
+          </a:p>
+          <a:p>
+            <a:pPr>
+              <a:spcAft>
+                <a:spcPts val="300"/>
+              </a:spcAft>
+              <a:defRPr sz="1300">
+                <a:solidFill>
+                  <a:srgbClr val="1F2937"/>
+                </a:solidFill>
+              </a:defRPr>
+            </a:pPr>
+            <a:r>
+              <a:t>Email does not require utm_creative</a:t>
+            </a:r>
+          </a:p>
+          <a:p>
+            <a:pPr>
+              <a:spcAft>
+                <a:spcPts val="300"/>
+              </a:spcAft>
+              <a:defRPr sz="1300">
+                <a:solidFill>
+                  <a:srgbClr val="1F2937"/>
+                </a:solidFill>
+              </a:defRPr>
+            </a:pPr>
+            <a:r>
+              <a:t>utm_source is an approved email platform</a:t>
+            </a:r>
+          </a:p>
+          <a:p>
+            <a:pPr>
+              <a:spcAft>
+                <a:spcPts val="300"/>
+              </a:spcAft>
+              <a:defRPr sz="1300">
+                <a:solidFill>
+                  <a:srgbClr val="1F2937"/>
+                </a:solidFill>
+              </a:defRPr>
+            </a:pPr>
+            <a:r>
+              <a:t>Empty or future-only parameters are omitted</a:t>
+            </a:r>
+          </a:p>
+        </p:txBody>
+      </p:sp>
+      <p:sp>
+        <p:nvSpPr>
+          <p:cNvPr id="5" name="Rounded Rectangle 4"/>
+          <p:cNvSpPr/>
+          <p:nvPr/>
+        </p:nvSpPr>
+        <p:spPr>
+          <a:xfrm>
+            <a:off x="658368" y="5687568"/>
+            <a:ext cx="10881360" cy="658368"/>
+          </a:xfrm>
+          <a:prstGeom prst="roundRect">
+            <a:avLst/>
+          </a:prstGeom>
+          <a:solidFill>
+            <a:srgbClr val="F5F8FB"/>
+          </a:solidFill>
+          <a:ln>
+            <a:solidFill>
+              <a:srgbClr val="E2F0FA"/>
+            </a:solidFill>
+          </a:ln>
+        </p:spPr>
+        <p:style>
+          <a:lnRef idx="1">
+            <a:schemeClr val="accent1"/>
+          </a:lnRef>
+          <a:fillRef idx="3">
+            <a:schemeClr val="accent1"/>
+          </a:fillRef>
+          <a:effectRef idx="2">
+            <a:schemeClr val="accent1"/>
+          </a:effectRef>
+          <a:fontRef idx="minor">
+            <a:schemeClr val="lt1"/>
+          </a:fontRef>
+        </p:style>
+        <p:txBody>
+          <a:bodyPr rtlCol="0" anchor="ctr"/>
+          <a:lstStyle/>
+          <a:p>
+            <a:pPr algn="ctr">
+              <a:defRPr sz="900">
+                <a:solidFill>
+                  <a:srgbClr val="5C7080"/>
+                </a:solidFill>
+              </a:defRPr>
+            </a:pPr>
+            <a:r>
+              <a:t>Facilitator note: The source document lists email source values but does not list email DTID values in the provided DTID table; keep DTID populated from approved intake/mapping data.</a:t>
+            </a:r>
+          </a:p>
+        </p:txBody>
+      </p:sp>
+      <p:sp>
+        <p:nvSpPr>
+          <p:cNvPr id="6" name="TextBox 5"/>
+          <p:cNvSpPr txBox="1"/>
+          <p:nvPr/>
+        </p:nvSpPr>
+        <p:spPr>
+          <a:xfrm>
+            <a:off x="411480" y="6510528"/>
+            <a:ext cx="11384280" cy="201168"/>
+          </a:xfrm>
+          <a:prstGeom prst="rect">
+            <a:avLst/>
+          </a:prstGeom>
+          <a:noFill/>
+        </p:spPr>
+        <p:txBody>
+          <a:bodyPr wrap="none">
+            <a:spAutoFit/>
+          </a:bodyPr>
+          <a:lstStyle/>
+          <a:p>
+            <a:pPr algn="r">
+              <a:defRPr sz="700">
+                <a:solidFill>
+                  <a:srgbClr val="5C7080"/>
+                </a:solidFill>
+              </a:defRPr>
+            </a:pPr>
+            <a:r>
+              <a:t>FY27 Tagging and Tracking Training | Repository-backed draft | Slide 22</a:t>
+            </a:r>
+          </a:p>
+        </p:txBody>
+      </p:sp>
+    </p:spTree>
+  </p:cSld>
+  <p:clrMapOvr>
+    <a:masterClrMapping/>
+  </p:clrMapOvr>
+</p:sld>
+</file>
+
+<file path=ppt/slides/slide23.xml><?xml version="1.0" encoding="utf-8"?>
+<p:sld xmlns:a="http://schemas.openxmlformats.org/drawingml/2006/main" xmlns:p="http://schemas.openxmlformats.org/presentationml/2006/main" xmlns:r="http://schemas.openxmlformats.org/officeDocument/2006/relationships">
+  <p:cSld>
+    <p:bg>
+      <p:bgPr>
+        <a:solidFill>
+          <a:srgbClr val="FFFFFF"/>
+        </a:solidFill>
+        <a:effectLst/>
+      </p:bgPr>
+    </p:bg>
+    <p:spTree>
+      <p:nvGrpSpPr>
+        <p:cNvPr id="1" name=""/>
+        <p:cNvGrpSpPr/>
+        <p:nvPr/>
+      </p:nvGrpSpPr>
+      <p:grpSpPr/>
+      <p:sp>
+        <p:nvSpPr>
+          <p:cNvPr id="2" name="Rectangle 1"/>
+          <p:cNvSpPr/>
+          <p:nvPr/>
+        </p:nvSpPr>
+        <p:spPr>
+          <a:xfrm>
+            <a:off x="0" y="0"/>
+            <a:ext cx="12191695" cy="164592"/>
+          </a:xfrm>
+          <a:prstGeom prst="rect">
+            <a:avLst/>
+          </a:prstGeom>
+          <a:solidFill>
+            <a:srgbClr val="005596"/>
+          </a:solidFill>
+          <a:ln>
+            <a:noFill/>
+          </a:ln>
+        </p:spPr>
+        <p:style>
+          <a:lnRef idx="1">
+            <a:schemeClr val="accent1"/>
+          </a:lnRef>
+          <a:fillRef idx="3">
+            <a:schemeClr val="accent1"/>
+          </a:fillRef>
+          <a:effectRef idx="2">
+            <a:schemeClr val="accent1"/>
+          </a:effectRef>
+          <a:fontRef idx="minor">
+            <a:schemeClr val="lt1"/>
+          </a:fontRef>
+        </p:style>
+        <p:txBody>
+          <a:bodyPr rtlCol="0" anchor="ctr"/>
+          <a:lstStyle/>
+          <a:p>
+            <a:pPr algn="ctr"/>
+          </a:p>
+        </p:txBody>
+      </p:sp>
+      <p:sp>
+        <p:nvSpPr>
+          <p:cNvPr id="3" name="TextBox 2"/>
+          <p:cNvSpPr txBox="1"/>
+          <p:nvPr/>
+        </p:nvSpPr>
+        <p:spPr>
+          <a:xfrm>
+            <a:off x="502920" y="347472"/>
+            <a:ext cx="10972800" cy="594360"/>
+          </a:xfrm>
+          <a:prstGeom prst="rect">
+            <a:avLst/>
+          </a:prstGeom>
+          <a:noFill/>
+        </p:spPr>
+        <p:txBody>
+          <a:bodyPr wrap="none">
+            <a:spAutoFit/>
+          </a:bodyPr>
+          <a:lstStyle/>
+          <a:p>
+            <a:pPr>
+              <a:defRPr b="1" sz="2800">
+                <a:solidFill>
+                  <a:srgbClr val="005596"/>
+                </a:solidFill>
+              </a:defRPr>
+            </a:pPr>
+            <a:r>
+              <a:t>Incorrect examples and impacts</a:t>
+            </a:r>
+          </a:p>
+        </p:txBody>
+      </p:sp>
+      <p:sp>
+        <p:nvSpPr>
+          <p:cNvPr id="4" name="TextBox 3"/>
+          <p:cNvSpPr txBox="1"/>
+          <p:nvPr/>
+        </p:nvSpPr>
+        <p:spPr>
+          <a:xfrm>
+            <a:off x="658368" y="1143000"/>
+            <a:ext cx="10881360" cy="4526280"/>
+          </a:xfrm>
+          <a:prstGeom prst="rect">
+            <a:avLst/>
+          </a:prstGeom>
+          <a:noFill/>
+        </p:spPr>
+        <p:txBody>
+          <a:bodyPr wrap="square" lIns="73152" rIns="73152" bIns="27432">
+            <a:spAutoFit/>
+          </a:bodyPr>
+          <a:lstStyle/>
+          <a:p>
+            <a:pPr>
+              <a:spcAft>
+                <a:spcPts val="300"/>
+              </a:spcAft>
+              <a:defRPr sz="1300">
+                <a:solidFill>
+                  <a:srgbClr val="5C7080"/>
+                </a:solidFill>
+              </a:defRPr>
+            </a:pPr>
+            <a:r>
+              <a:t>Incorrect pattern | Impact</a:t>
+            </a:r>
+          </a:p>
+          <a:p>
+            <a:pPr>
+              <a:spcAft>
+                <a:spcPts val="300"/>
+              </a:spcAft>
+              <a:defRPr sz="1300">
+                <a:solidFill>
+                  <a:srgbClr val="5C7080"/>
+                </a:solidFill>
+              </a:defRPr>
+            </a:pPr>
+            <a:r>
+              <a:t>utm_medium=Paid Social | Creates inconsistent channel classification</a:t>
+            </a:r>
+          </a:p>
+          <a:p>
+            <a:pPr>
+              <a:spcAft>
+                <a:spcPts val="300"/>
+              </a:spcAft>
+              <a:defRPr sz="1300">
+                <a:solidFill>
+                  <a:srgbClr val="5C7080"/>
+                </a:solidFill>
+              </a:defRPr>
+            </a:pPr>
+            <a:r>
+              <a:t>utm_medium=social for paid social | Paid activity may report as organic social</a:t>
+            </a:r>
+          </a:p>
+          <a:p>
+            <a:pPr>
+              <a:spcAft>
+                <a:spcPts val="300"/>
+              </a:spcAft>
+              <a:defRPr sz="1300">
+                <a:solidFill>
+                  <a:srgbClr val="5C7080"/>
+                </a:solidFill>
+              </a:defRPr>
+            </a:pPr>
+            <a:r>
+              <a:t>utm_source=LinkedIn Ads | Splits platform reporting from approved linkedin</a:t>
+            </a:r>
+          </a:p>
+          <a:p>
+            <a:pPr>
+              <a:spcAft>
+                <a:spcPts val="300"/>
+              </a:spcAft>
+              <a:defRPr sz="1300">
+                <a:solidFill>
+                  <a:srgbClr val="5C7080"/>
+                </a:solidFill>
+              </a:defRPr>
+            </a:pPr>
+            <a:r>
+              <a:t>utm_id=cc008318 while ccid=cc008317 | Campaign attribution mismatch</a:t>
+            </a:r>
+          </a:p>
+          <a:p>
+            <a:pPr>
+              <a:spcAft>
+                <a:spcPts val="300"/>
+              </a:spcAft>
+              <a:defRPr sz="1300">
+                <a:solidFill>
+                  <a:srgbClr val="5C7080"/>
+                </a:solidFill>
+              </a:defRPr>
+            </a:pPr>
+            <a:r>
+              <a:t>Missing utm_creative on Paid Direct | Creative-level attribution gap</a:t>
+            </a:r>
+          </a:p>
+          <a:p>
+            <a:pPr>
+              <a:spcAft>
+                <a:spcPts val="300"/>
+              </a:spcAft>
+              <a:defRPr sz="1300">
+                <a:solidFill>
+                  <a:srgbClr val="5C7080"/>
+                </a:solidFill>
+              </a:defRPr>
+            </a:pPr>
+            <a:r>
+              <a:t>Empty parameter like utm_campaign= | Adds noise; omit future-only or empty parameters</a:t>
+            </a:r>
+          </a:p>
+        </p:txBody>
+      </p:sp>
+      <p:sp>
+        <p:nvSpPr>
+          <p:cNvPr id="5" name="Rounded Rectangle 4"/>
+          <p:cNvSpPr/>
+          <p:nvPr/>
+        </p:nvSpPr>
+        <p:spPr>
+          <a:xfrm>
+            <a:off x="658368" y="5687568"/>
+            <a:ext cx="10881360" cy="658368"/>
+          </a:xfrm>
+          <a:prstGeom prst="roundRect">
+            <a:avLst/>
+          </a:prstGeom>
+          <a:solidFill>
+            <a:srgbClr val="F5F8FB"/>
+          </a:solidFill>
+          <a:ln>
+            <a:solidFill>
+              <a:srgbClr val="E2F0FA"/>
+            </a:solidFill>
+          </a:ln>
+        </p:spPr>
+        <p:style>
+          <a:lnRef idx="1">
+            <a:schemeClr val="accent1"/>
+          </a:lnRef>
+          <a:fillRef idx="3">
+            <a:schemeClr val="accent1"/>
+          </a:fillRef>
+          <a:effectRef idx="2">
+            <a:schemeClr val="accent1"/>
+          </a:effectRef>
+          <a:fontRef idx="minor">
+            <a:schemeClr val="lt1"/>
+          </a:fontRef>
+        </p:style>
+        <p:txBody>
+          <a:bodyPr rtlCol="0" anchor="ctr"/>
+          <a:lstStyle/>
+          <a:p>
+            <a:pPr algn="ctr">
+              <a:defRPr sz="900">
+                <a:solidFill>
+                  <a:srgbClr val="5C7080"/>
+                </a:solidFill>
+              </a:defRPr>
+            </a:pPr>
+            <a:r>
+              <a:t>Facilitator note: These are training examples based on the rules in the repository source.</a:t>
+            </a:r>
+          </a:p>
+        </p:txBody>
+      </p:sp>
+      <p:sp>
+        <p:nvSpPr>
+          <p:cNvPr id="6" name="TextBox 5"/>
+          <p:cNvSpPr txBox="1"/>
+          <p:nvPr/>
+        </p:nvSpPr>
+        <p:spPr>
+          <a:xfrm>
+            <a:off x="411480" y="6510528"/>
+            <a:ext cx="11384280" cy="201168"/>
+          </a:xfrm>
+          <a:prstGeom prst="rect">
+            <a:avLst/>
+          </a:prstGeom>
+          <a:noFill/>
+        </p:spPr>
+        <p:txBody>
+          <a:bodyPr wrap="none">
+            <a:spAutoFit/>
+          </a:bodyPr>
+          <a:lstStyle/>
+          <a:p>
+            <a:pPr algn="r">
+              <a:defRPr sz="700">
+                <a:solidFill>
+                  <a:srgbClr val="5C7080"/>
+                </a:solidFill>
+              </a:defRPr>
+            </a:pPr>
+            <a:r>
+              <a:t>FY27 Tagging and Tracking Training | Repository-backed draft | Slide 23</a:t>
+            </a:r>
+          </a:p>
+        </p:txBody>
+      </p:sp>
+    </p:spTree>
+  </p:cSld>
+  <p:clrMapOvr>
+    <a:masterClrMapping/>
+  </p:clrMapOvr>
+</p:sld>
+</file>
+
+<file path=ppt/slides/slide24.xml><?xml version="1.0" encoding="utf-8"?>
+<p:sld xmlns:a="http://schemas.openxmlformats.org/drawingml/2006/main" xmlns:p="http://schemas.openxmlformats.org/presentationml/2006/main" xmlns:r="http://schemas.openxmlformats.org/officeDocument/2006/relationships">
+  <p:cSld>
+    <p:bg>
+      <p:bgPr>
+        <a:solidFill>
+          <a:srgbClr val="FFFFFF"/>
+        </a:solidFill>
+        <a:effectLst/>
+      </p:bgPr>
+    </p:bg>
+    <p:spTree>
+      <p:nvGrpSpPr>
+        <p:cNvPr id="1" name=""/>
+        <p:cNvGrpSpPr/>
+        <p:nvPr/>
+      </p:nvGrpSpPr>
+      <p:grpSpPr/>
+      <p:sp>
+        <p:nvSpPr>
+          <p:cNvPr id="2" name="Rectangle 1"/>
+          <p:cNvSpPr/>
+          <p:nvPr/>
+        </p:nvSpPr>
+        <p:spPr>
+          <a:xfrm>
+            <a:off x="0" y="0"/>
+            <a:ext cx="12191695" cy="164592"/>
+          </a:xfrm>
+          <a:prstGeom prst="rect">
+            <a:avLst/>
+          </a:prstGeom>
+          <a:solidFill>
+            <a:srgbClr val="005596"/>
+          </a:solidFill>
+          <a:ln>
+            <a:noFill/>
+          </a:ln>
+        </p:spPr>
+        <p:style>
+          <a:lnRef idx="1">
+            <a:schemeClr val="accent1"/>
+          </a:lnRef>
+          <a:fillRef idx="3">
+            <a:schemeClr val="accent1"/>
+          </a:fillRef>
+          <a:effectRef idx="2">
+            <a:schemeClr val="accent1"/>
+          </a:effectRef>
+          <a:fontRef idx="minor">
+            <a:schemeClr val="lt1"/>
+          </a:fontRef>
+        </p:style>
+        <p:txBody>
+          <a:bodyPr rtlCol="0" anchor="ctr"/>
+          <a:lstStyle/>
+          <a:p>
+            <a:pPr algn="ctr"/>
+          </a:p>
+        </p:txBody>
+      </p:sp>
+      <p:sp>
+        <p:nvSpPr>
+          <p:cNvPr id="3" name="TextBox 2"/>
+          <p:cNvSpPr txBox="1"/>
+          <p:nvPr/>
+        </p:nvSpPr>
+        <p:spPr>
+          <a:xfrm>
+            <a:off x="502920" y="347472"/>
+            <a:ext cx="10972800" cy="594360"/>
+          </a:xfrm>
+          <a:prstGeom prst="rect">
+            <a:avLst/>
+          </a:prstGeom>
+          <a:noFill/>
+        </p:spPr>
+        <p:txBody>
+          <a:bodyPr wrap="none">
+            <a:spAutoFit/>
+          </a:bodyPr>
+          <a:lstStyle/>
+          <a:p>
+            <a:pPr>
+              <a:defRPr b="1" sz="2800">
+                <a:solidFill>
+                  <a:srgbClr val="005596"/>
+                </a:solidFill>
+              </a:defRPr>
+            </a:pPr>
+            <a:r>
+              <a:t>User checklist before launch</a:t>
+            </a:r>
+          </a:p>
+        </p:txBody>
+      </p:sp>
+      <p:sp>
+        <p:nvSpPr>
+          <p:cNvPr id="4" name="TextBox 3"/>
+          <p:cNvSpPr txBox="1"/>
+          <p:nvPr/>
+        </p:nvSpPr>
+        <p:spPr>
+          <a:xfrm>
+            <a:off x="658368" y="1143000"/>
+            <a:ext cx="10881360" cy="4526280"/>
+          </a:xfrm>
+          <a:prstGeom prst="rect">
+            <a:avLst/>
+          </a:prstGeom>
+          <a:noFill/>
+        </p:spPr>
+        <p:txBody>
+          <a:bodyPr wrap="square" lIns="73152" rIns="73152" bIns="27432">
+            <a:spAutoFit/>
+          </a:bodyPr>
+          <a:lstStyle/>
+          <a:p>
+            <a:pPr>
+              <a:spcAft>
+                <a:spcPts val="300"/>
+              </a:spcAft>
+              <a:defRPr sz="1500" b="1">
+                <a:solidFill>
+                  <a:srgbClr val="005596"/>
+                </a:solidFill>
+              </a:defRPr>
+            </a:pPr>
+            <a:r>
+              <a:t>Before a URL is used, confirm:</a:t>
+            </a:r>
+          </a:p>
+          <a:p>
+            <a:pPr>
+              <a:spcAft>
+                <a:spcPts val="300"/>
+              </a:spcAft>
+              <a:defRPr sz="1500">
+                <a:solidFill>
+                  <a:srgbClr val="1F2937"/>
+                </a:solidFill>
+              </a:defRPr>
+            </a:pPr>
+            <a:r>
+              <a:t>The build path is correct: Workfront, Stensul, or Manual URL Builder.</a:t>
+            </a:r>
+          </a:p>
+          <a:p>
+            <a:pPr>
+              <a:spcAft>
+                <a:spcPts val="300"/>
+              </a:spcAft>
+              <a:defRPr sz="1500">
+                <a:solidFill>
+                  <a:srgbClr val="1F2937"/>
+                </a:solidFill>
+              </a:defRPr>
+            </a:pPr>
+            <a:r>
+              <a:t>ccid, dtid, utm_id, utm_medium, and utm_source are present.</a:t>
+            </a:r>
+          </a:p>
+          <a:p>
+            <a:pPr>
+              <a:spcAft>
+                <a:spcPts val="300"/>
+              </a:spcAft>
+              <a:defRPr sz="1500">
+                <a:solidFill>
+                  <a:srgbClr val="1F2937"/>
+                </a:solidFill>
+              </a:defRPr>
+            </a:pPr>
+            <a:r>
+              <a:t>utm_id exactly matches ccid.</a:t>
+            </a:r>
+          </a:p>
+          <a:p>
+            <a:pPr>
+              <a:spcAft>
+                <a:spcPts val="300"/>
+              </a:spcAft>
+              <a:defRPr sz="1500">
+                <a:solidFill>
+                  <a:srgbClr val="1F2937"/>
+                </a:solidFill>
+              </a:defRPr>
+            </a:pPr>
+            <a:r>
+              <a:t>utm_medium is one of the approved values.</a:t>
+            </a:r>
+          </a:p>
+          <a:p>
+            <a:pPr>
+              <a:spcAft>
+                <a:spcPts val="300"/>
+              </a:spcAft>
+              <a:defRPr sz="1500">
+                <a:solidFill>
+                  <a:srgbClr val="1F2937"/>
+                </a:solidFill>
+              </a:defRPr>
+            </a:pPr>
+            <a:r>
+              <a:t>utm_source is approved for the channel.</a:t>
+            </a:r>
+          </a:p>
+          <a:p>
+            <a:pPr>
+              <a:spcAft>
+                <a:spcPts val="300"/>
+              </a:spcAft>
+              <a:defRPr sz="1500">
+                <a:solidFill>
+                  <a:srgbClr val="1F2937"/>
+                </a:solidFill>
+              </a:defRPr>
+            </a:pPr>
+            <a:r>
+              <a:t>utm_creative=%ecid! is included only when required.</a:t>
+            </a:r>
+          </a:p>
+          <a:p>
+            <a:pPr>
+              <a:spcAft>
+                <a:spcPts val="300"/>
+              </a:spcAft>
+              <a:defRPr sz="1500">
+                <a:solidFill>
+                  <a:srgbClr val="1F2937"/>
+                </a:solidFill>
+              </a:defRPr>
+            </a:pPr>
+            <a:r>
+              <a:t>Values are lowercase and hyphenated.</a:t>
+            </a:r>
+          </a:p>
+          <a:p>
+            <a:pPr>
+              <a:spcAft>
+                <a:spcPts val="300"/>
+              </a:spcAft>
+              <a:defRPr sz="1500">
+                <a:solidFill>
+                  <a:srgbClr val="1F2937"/>
+                </a:solidFill>
+              </a:defRPr>
+            </a:pPr>
+            <a:r>
+              <a:t>Empty parameters are omitted.</a:t>
+            </a:r>
+          </a:p>
+        </p:txBody>
+      </p:sp>
+      <p:sp>
+        <p:nvSpPr>
+          <p:cNvPr id="5" name="Rounded Rectangle 4"/>
+          <p:cNvSpPr/>
+          <p:nvPr/>
+        </p:nvSpPr>
+        <p:spPr>
+          <a:xfrm>
+            <a:off x="658368" y="5687568"/>
+            <a:ext cx="10881360" cy="658368"/>
+          </a:xfrm>
+          <a:prstGeom prst="roundRect">
+            <a:avLst/>
+          </a:prstGeom>
+          <a:solidFill>
+            <a:srgbClr val="F5F8FB"/>
+          </a:solidFill>
+          <a:ln>
+            <a:solidFill>
+              <a:srgbClr val="E2F0FA"/>
+            </a:solidFill>
+          </a:ln>
+        </p:spPr>
+        <p:style>
+          <a:lnRef idx="1">
+            <a:schemeClr val="accent1"/>
+          </a:lnRef>
+          <a:fillRef idx="3">
+            <a:schemeClr val="accent1"/>
+          </a:fillRef>
+          <a:effectRef idx="2">
+            <a:schemeClr val="accent1"/>
+          </a:effectRef>
+          <a:fontRef idx="minor">
+            <a:schemeClr val="lt1"/>
+          </a:fontRef>
+        </p:style>
+        <p:txBody>
+          <a:bodyPr rtlCol="0" anchor="ctr"/>
+          <a:lstStyle/>
+          <a:p>
+            <a:pPr algn="ctr">
+              <a:defRPr sz="900">
+                <a:solidFill>
+                  <a:srgbClr val="5C7080"/>
+                </a:solidFill>
+              </a:defRPr>
+            </a:pPr>
+            <a:r>
+              <a:t>Facilitator note: This can become a one-page job aid for launch readiness.</a:t>
+            </a:r>
+          </a:p>
+        </p:txBody>
+      </p:sp>
+      <p:sp>
+        <p:nvSpPr>
+          <p:cNvPr id="6" name="TextBox 5"/>
+          <p:cNvSpPr txBox="1"/>
+          <p:nvPr/>
+        </p:nvSpPr>
+        <p:spPr>
+          <a:xfrm>
+            <a:off x="411480" y="6510528"/>
+            <a:ext cx="11384280" cy="201168"/>
+          </a:xfrm>
+          <a:prstGeom prst="rect">
+            <a:avLst/>
+          </a:prstGeom>
+          <a:noFill/>
+        </p:spPr>
+        <p:txBody>
+          <a:bodyPr wrap="none">
+            <a:spAutoFit/>
+          </a:bodyPr>
+          <a:lstStyle/>
+          <a:p>
+            <a:pPr algn="r">
+              <a:defRPr sz="700">
+                <a:solidFill>
+                  <a:srgbClr val="5C7080"/>
+                </a:solidFill>
+              </a:defRPr>
+            </a:pPr>
+            <a:r>
+              <a:t>FY27 Tagging and Tracking Training | Repository-backed draft | Slide 24</a:t>
+            </a:r>
+          </a:p>
+        </p:txBody>
+      </p:sp>
+    </p:spTree>
+  </p:cSld>
+  <p:clrMapOvr>
+    <a:masterClrMapping/>
+  </p:clrMapOvr>
+</p:sld>
+</file>
+
+<file path=ppt/slides/slide25.xml><?xml version="1.0" encoding="utf-8"?>
+<p:sld xmlns:a="http://schemas.openxmlformats.org/drawingml/2006/main" xmlns:p="http://schemas.openxmlformats.org/presentationml/2006/main" xmlns:r="http://schemas.openxmlformats.org/officeDocument/2006/relationships">
+  <p:cSld>
+    <p:bg>
+      <p:bgPr>
+        <a:solidFill>
+          <a:srgbClr val="FFFFFF"/>
+        </a:solidFill>
+        <a:effectLst/>
+      </p:bgPr>
+    </p:bg>
+    <p:spTree>
+      <p:nvGrpSpPr>
+        <p:cNvPr id="1" name=""/>
+        <p:cNvGrpSpPr/>
+        <p:nvPr/>
+      </p:nvGrpSpPr>
+      <p:grpSpPr/>
+      <p:sp>
+        <p:nvSpPr>
+          <p:cNvPr id="2" name="Rectangle 1"/>
+          <p:cNvSpPr/>
+          <p:nvPr/>
+        </p:nvSpPr>
+        <p:spPr>
+          <a:xfrm>
+            <a:off x="0" y="0"/>
+            <a:ext cx="12191695" cy="164592"/>
+          </a:xfrm>
+          <a:prstGeom prst="rect">
+            <a:avLst/>
+          </a:prstGeom>
+          <a:solidFill>
+            <a:srgbClr val="005596"/>
+          </a:solidFill>
+          <a:ln>
+            <a:noFill/>
+          </a:ln>
+        </p:spPr>
+        <p:style>
+          <a:lnRef idx="1">
+            <a:schemeClr val="accent1"/>
+          </a:lnRef>
+          <a:fillRef idx="3">
+            <a:schemeClr val="accent1"/>
+          </a:fillRef>
+          <a:effectRef idx="2">
+            <a:schemeClr val="accent1"/>
+          </a:effectRef>
+          <a:fontRef idx="minor">
+            <a:schemeClr val="lt1"/>
+          </a:fontRef>
+        </p:style>
+        <p:txBody>
+          <a:bodyPr rtlCol="0" anchor="ctr"/>
+          <a:lstStyle/>
+          <a:p>
+            <a:pPr algn="ctr"/>
+          </a:p>
+        </p:txBody>
+      </p:sp>
+      <p:sp>
+        <p:nvSpPr>
+          <p:cNvPr id="3" name="TextBox 2"/>
+          <p:cNvSpPr txBox="1"/>
+          <p:nvPr/>
+        </p:nvSpPr>
+        <p:spPr>
+          <a:xfrm>
+            <a:off x="502920" y="347472"/>
+            <a:ext cx="10972800" cy="594360"/>
+          </a:xfrm>
+          <a:prstGeom prst="rect">
+            <a:avLst/>
+          </a:prstGeom>
+          <a:noFill/>
+        </p:spPr>
+        <p:txBody>
+          <a:bodyPr wrap="none">
+            <a:spAutoFit/>
+          </a:bodyPr>
+          <a:lstStyle/>
+          <a:p>
+            <a:pPr>
+              <a:defRPr b="1" sz="2800">
+                <a:solidFill>
+                  <a:srgbClr val="005596"/>
+                </a:solidFill>
+              </a:defRPr>
+            </a:pPr>
+            <a:r>
+              <a:t>Where to go for updates</a:t>
+            </a:r>
+          </a:p>
+        </p:txBody>
+      </p:sp>
+      <p:sp>
+        <p:nvSpPr>
+          <p:cNvPr id="4" name="TextBox 3"/>
+          <p:cNvSpPr txBox="1"/>
+          <p:nvPr/>
+        </p:nvSpPr>
+        <p:spPr>
+          <a:xfrm>
+            <a:off x="658368" y="1143000"/>
+            <a:ext cx="10881360" cy="4526280"/>
+          </a:xfrm>
+          <a:prstGeom prst="rect">
+            <a:avLst/>
+          </a:prstGeom>
+          <a:noFill/>
+        </p:spPr>
+        <p:txBody>
+          <a:bodyPr wrap="square" lIns="73152" rIns="73152" bIns="27432">
+            <a:spAutoFit/>
+          </a:bodyPr>
+          <a:lstStyle/>
+          <a:p>
+            <a:pPr>
+              <a:spcAft>
+                <a:spcPts val="300"/>
+              </a:spcAft>
+              <a:defRPr sz="1300">
+                <a:solidFill>
+                  <a:srgbClr val="1F2937"/>
+                </a:solidFill>
+              </a:defRPr>
+            </a:pPr>
+            <a:r>
+              <a:t>Workfront intake mappings: Source and Mediums.xlsx</a:t>
+            </a:r>
+          </a:p>
+          <a:p>
+            <a:pPr>
+              <a:spcAft>
+                <a:spcPts val="300"/>
+              </a:spcAft>
+              <a:defRPr sz="1300">
+                <a:solidFill>
+                  <a:srgbClr val="1F2937"/>
+                </a:solidFill>
+              </a:defRPr>
+            </a:pPr>
+            <a:r>
+              <a:t>Repository source document: UTM Framework New Training.md</a:t>
+            </a:r>
+          </a:p>
+          <a:p>
+            <a:pPr>
+              <a:spcAft>
+                <a:spcPts val="300"/>
+              </a:spcAft>
+              <a:defRPr sz="1300">
+                <a:solidFill>
+                  <a:srgbClr val="1F2937"/>
+                </a:solidFill>
+              </a:defRPr>
+            </a:pPr>
+            <a:r>
+              <a:t>CTT source context: Tagging &amp; Tracking Overview - FY27 New Training.pptx</a:t>
+            </a:r>
+          </a:p>
+          <a:p>
+            <a:pPr>
+              <a:spcAft>
+                <a:spcPts val="300"/>
+              </a:spcAft>
+              <a:defRPr sz="1300">
+                <a:solidFill>
+                  <a:srgbClr val="1F2937"/>
+                </a:solidFill>
+              </a:defRPr>
+            </a:pPr>
+            <a:r>
+              <a:t>Historical CTT usage context: Creating your Activity ID - Old Training Presentation.pptx</a:t>
+            </a:r>
+          </a:p>
+          <a:p>
+            <a:pPr>
+              <a:spcAft>
+                <a:spcPts val="300"/>
+              </a:spcAft>
+              <a:defRPr sz="1300">
+                <a:solidFill>
+                  <a:srgbClr val="1F2937"/>
+                </a:solidFill>
+              </a:defRPr>
+            </a:pPr>
+            <a:r>
+              <a:t>Historical UTM strategy context: UTM Overview - Old Training.pptx</a:t>
+            </a:r>
+          </a:p>
+          <a:p>
+            <a:pPr>
+              <a:spcAft>
+                <a:spcPts val="300"/>
+              </a:spcAft>
+              <a:defRPr sz="1300">
+                <a:solidFill>
+                  <a:srgbClr val="1F2937"/>
+                </a:solidFill>
+              </a:defRPr>
+            </a:pPr>
+            <a:r>
+              <a:t>Generated training deck: FY27 Tagging and Tracking Training Deck.pptx</a:t>
+            </a:r>
+          </a:p>
+          <a:p>
+            <a:pPr>
+              <a:spcAft>
+                <a:spcPts val="300"/>
+              </a:spcAft>
+              <a:defRPr sz="1300">
+                <a:solidFill>
+                  <a:srgbClr val="1F2937"/>
+                </a:solidFill>
+              </a:defRPr>
+            </a:pPr>
+            <a:r>
+              <a:t>Editable deck source: FY27 Tagging and Tracking Training Deck.md</a:t>
+            </a:r>
+          </a:p>
+          <a:p>
+            <a:pPr>
+              <a:spcAft>
+                <a:spcPts val="300"/>
+              </a:spcAft>
+              <a:defRPr sz="1300" b="1">
+                <a:solidFill>
+                  <a:srgbClr val="005596"/>
+                </a:solidFill>
+              </a:defRPr>
+            </a:pPr>
+            <a:r>
+              <a:t>Open items for FY27:</a:t>
+            </a:r>
+          </a:p>
+          <a:p>
+            <a:pPr>
+              <a:spcAft>
+                <a:spcPts val="300"/>
+              </a:spcAft>
+              <a:defRPr sz="1300">
+                <a:solidFill>
+                  <a:srgbClr val="1F2937"/>
+                </a:solidFill>
+              </a:defRPr>
+            </a:pPr>
+            <a:r>
+              <a:t>Confirm final precedence order.</a:t>
+            </a:r>
+          </a:p>
+          <a:p>
+            <a:pPr>
+              <a:spcAft>
+                <a:spcPts val="300"/>
+              </a:spcAft>
+              <a:defRPr sz="1300">
+                <a:solidFill>
+                  <a:srgbClr val="1F2937"/>
+                </a:solidFill>
+              </a:defRPr>
+            </a:pPr>
+            <a:r>
+              <a:t>Confirm final persistence behavior by reporting surface.</a:t>
+            </a:r>
+          </a:p>
+          <a:p>
+            <a:pPr>
+              <a:spcAft>
+                <a:spcPts val="300"/>
+              </a:spcAft>
+              <a:defRPr sz="1300">
+                <a:solidFill>
+                  <a:srgbClr val="1F2937"/>
+                </a:solidFill>
+              </a:defRPr>
+            </a:pPr>
+            <a:r>
+              <a:t>Confirm when CCID/DTID retirement criteria are met.</a:t>
+            </a:r>
+          </a:p>
+          <a:p>
+            <a:pPr>
+              <a:spcAft>
+                <a:spcPts val="300"/>
+              </a:spcAft>
+              <a:defRPr sz="1300">
+                <a:solidFill>
+                  <a:srgbClr val="1F2937"/>
+                </a:solidFill>
+              </a:defRPr>
+            </a:pPr>
+            <a:r>
+              <a:t>Confirm the final future-state Workfront Channel ID naming and handoff process.</a:t>
+            </a:r>
+          </a:p>
+          <a:p>
+            <a:pPr>
+              <a:spcAft>
+                <a:spcPts val="300"/>
+              </a:spcAft>
+              <a:defRPr sz="1300">
+                <a:solidFill>
+                  <a:srgbClr val="1F2937"/>
+                </a:solidFill>
+              </a:defRPr>
+            </a:pPr>
+            <a:r>
+              <a:t>Confirm whether utm_campaign becomes active and what naming convention it should follow.</a:t>
+            </a:r>
+          </a:p>
+          <a:p>
+            <a:pPr>
+              <a:spcAft>
+                <a:spcPts val="300"/>
+              </a:spcAft>
+              <a:defRPr sz="1300">
+                <a:solidFill>
+                  <a:srgbClr val="1F2937"/>
+                </a:solidFill>
+              </a:defRPr>
+            </a:pPr>
+            <a:r>
+              <a:t>Confirm any new approved utm_source values.</a:t>
+            </a:r>
+          </a:p>
+        </p:txBody>
+      </p:sp>
+      <p:sp>
+        <p:nvSpPr>
+          <p:cNvPr id="5" name="Rounded Rectangle 4"/>
+          <p:cNvSpPr/>
+          <p:nvPr/>
+        </p:nvSpPr>
+        <p:spPr>
+          <a:xfrm>
+            <a:off x="658368" y="5687568"/>
+            <a:ext cx="10881360" cy="658368"/>
+          </a:xfrm>
+          <a:prstGeom prst="roundRect">
+            <a:avLst/>
+          </a:prstGeom>
+          <a:solidFill>
+            <a:srgbClr val="F5F8FB"/>
+          </a:solidFill>
+          <a:ln>
+            <a:solidFill>
+              <a:srgbClr val="E2F0FA"/>
+            </a:solidFill>
+          </a:ln>
+        </p:spPr>
+        <p:style>
+          <a:lnRef idx="1">
+            <a:schemeClr val="accent1"/>
+          </a:lnRef>
+          <a:fillRef idx="3">
+            <a:schemeClr val="accent1"/>
+          </a:fillRef>
+          <a:effectRef idx="2">
+            <a:schemeClr val="accent1"/>
+          </a:effectRef>
+          <a:fontRef idx="minor">
+            <a:schemeClr val="lt1"/>
+          </a:fontRef>
+        </p:style>
+        <p:txBody>
+          <a:bodyPr rtlCol="0" anchor="ctr"/>
+          <a:lstStyle/>
+          <a:p>
+            <a:pPr algn="ctr">
+              <a:defRPr sz="900">
+                <a:solidFill>
+                  <a:srgbClr val="5C7080"/>
+                </a:solidFill>
+              </a:defRPr>
+            </a:pPr>
+            <a:r>
+              <a:t>Facilitator note: If governance changes, update the source Markdown and regenerate the PPTX so the repository remains the training source of truth.</a:t>
+            </a:r>
+          </a:p>
+        </p:txBody>
+      </p:sp>
+      <p:sp>
+        <p:nvSpPr>
+          <p:cNvPr id="6" name="TextBox 5"/>
+          <p:cNvSpPr txBox="1"/>
+          <p:nvPr/>
+        </p:nvSpPr>
+        <p:spPr>
+          <a:xfrm>
+            <a:off x="411480" y="6510528"/>
+            <a:ext cx="11384280" cy="201168"/>
+          </a:xfrm>
+          <a:prstGeom prst="rect">
+            <a:avLst/>
+          </a:prstGeom>
+          <a:noFill/>
+        </p:spPr>
+        <p:txBody>
+          <a:bodyPr wrap="none">
+            <a:spAutoFit/>
+          </a:bodyPr>
+          <a:lstStyle/>
+          <a:p>
+            <a:pPr algn="r">
+              <a:defRPr sz="700">
+                <a:solidFill>
+                  <a:srgbClr val="5C7080"/>
+                </a:solidFill>
+              </a:defRPr>
+            </a:pPr>
+            <a:r>
+              <a:t>FY27 Tagging and Tracking Training | Repository-backed draft | Slide 25</a:t>
             </a:r>
           </a:p>
         </p:txBody>
@@ -8425,7 +10140,7 @@
               </a:defRPr>
             </a:pPr>
             <a:r>
-              <a:t>Current-state URL anatomy</a:t>
+              <a:t>Future-state measurement model: CTT plus UTM</a:t>
             </a:r>
           </a:p>
         </p:txBody>
@@ -8463,7 +10178,7 @@
               </a:defRPr>
             </a:pPr>
             <a:r>
-              <a:t>Every standard tracking URL must include:</a:t>
+              <a:t>Future-state tracking should use both value families with clearer roles:</a:t>
             </a:r>
           </a:p>
           <a:p>
@@ -8478,7 +10193,7 @@
               </a:defRPr>
             </a:pPr>
             <a:r>
-              <a:t>ccid</a:t>
+              <a:t>CTT values identify the marketing initiative, traffic blueprint, offer, or event context.</a:t>
             </a:r>
           </a:p>
           <a:p>
@@ -8493,7 +10208,7 @@
               </a:defRPr>
             </a:pPr>
             <a:r>
-              <a:t>dtid</a:t>
+              <a:t>UTM values identify the digital traffic path: channel, platform/vendor, campaign, and creative.</a:t>
             </a:r>
           </a:p>
           <a:p>
@@ -8508,7 +10223,7 @@
               </a:defRPr>
             </a:pPr>
             <a:r>
-              <a:t>utm_id</a:t>
+              <a:t>Workfront remains the preferred place to automate values and reduce manual URL building.</a:t>
             </a:r>
           </a:p>
           <a:p>
@@ -8523,7 +10238,7 @@
               </a:defRPr>
             </a:pPr>
             <a:r>
-              <a:t>utm_medium</a:t>
+              <a:t>Adobe and marketing effectiveness reporting use standardized UTMs to compare channel and source performance.</a:t>
             </a:r>
           </a:p>
           <a:p>
@@ -8538,52 +10253,7 @@
               </a:defRPr>
             </a:pPr>
             <a:r>
-              <a:t>utm_source</a:t>
-            </a:r>
-          </a:p>
-          <a:p>
-            <a:pPr>
-              <a:spcAft>
-                <a:spcPts val="300"/>
-              </a:spcAft>
-              <a:defRPr sz="1500" b="1">
-                <a:solidFill>
-                  <a:srgbClr val="005596"/>
-                </a:solidFill>
-              </a:defRPr>
-            </a:pPr>
-            <a:r>
-              <a:t>Conditional:</a:t>
-            </a:r>
-          </a:p>
-          <a:p>
-            <a:pPr>
-              <a:spcAft>
-                <a:spcPts val="300"/>
-              </a:spcAft>
-              <a:defRPr sz="1500">
-                <a:solidFill>
-                  <a:srgbClr val="1F2937"/>
-                </a:solidFill>
-              </a:defRPr>
-            </a:pPr>
-            <a:r>
-              <a:t>utm_creative is required only for Paid Direct, Paid Programmatic, and Paid Social.</a:t>
-            </a:r>
-          </a:p>
-          <a:p>
-            <a:pPr>
-              <a:spcAft>
-                <a:spcPts val="300"/>
-              </a:spcAft>
-              <a:defRPr sz="1500">
-                <a:solidFill>
-                  <a:srgbClr val="1F2937"/>
-                </a:solidFill>
-              </a:defRPr>
-            </a:pPr>
-            <a:r>
-              <a:t>utm_campaign is optional and reserved for future use; omit it for standard tracking URLs today.</a:t>
+              <a:t>Lead, nurture, VDC, and seller context continue to depend on CTT-aligned metadata.</a:t>
             </a:r>
           </a:p>
         </p:txBody>
@@ -8637,7 +10307,7 @@
               </a:defRPr>
             </a:pPr>
             <a:r>
-              <a:t>Facilitator note: Source deck detail: utm_campaign omission is not a defect today.</a:t>
+              <a:t>Facilitator note: Source basis: the FY27 overview deck positions tagging and tracking as the connective tissue between marketing spend, customer engagement, lead routing, pipeline reporting, and seller context.</a:t>
             </a:r>
           </a:p>
         </p:txBody>
@@ -8776,7 +10446,7 @@
               </a:defRPr>
             </a:pPr>
             <a:r>
-              <a:t>What each required value does</a:t>
+              <a:t>How CTT values will be used</a:t>
             </a:r>
           </a:p>
         </p:txBody>
@@ -8814,7 +10484,7 @@
               </a:defRPr>
             </a:pPr>
             <a:r>
-              <a:t>Value | Purpose | Training takeaway</a:t>
+              <a:t>CTT value | Future usage | User guidance</a:t>
             </a:r>
           </a:p>
           <a:p>
@@ -8829,7 +10499,7 @@
               </a:defRPr>
             </a:pPr>
             <a:r>
-              <a:t>ccid | Identifies the channel activation in the system of record | Required on every tracking URL</a:t>
+              <a:t>Activity ID / CCID | Campaign, program, lead scoring, nurture, pipeline, and VDC alignment | Use for marketing initiatives expected to generate pipeline or enter scoring/nurture</a:t>
             </a:r>
           </a:p>
           <a:p>
@@ -8844,7 +10514,7 @@
               </a:defRPr>
             </a:pPr>
             <a:r>
-              <a:t>dtid | Identifies channel and platform/vendor in the legacy framework | Required during current hybrid state</a:t>
+              <a:t>Drive To ID / DTID | Channel or vehicle that drives the customer to Cisco-owned web properties | Use for external traffic-driving links; do not treat Cisco.com as the vehicle</a:t>
             </a:r>
           </a:p>
           <a:p>
@@ -8859,7 +10529,7 @@
               </a:defRPr>
             </a:pPr>
             <a:r>
-              <a:t>utm_id | Passes the campaign identifier into analytics | Must equal ccid exactly today</a:t>
+              <a:t>Offer ID | Gated offer or asset consumed before lead generation | Add in the gated offer page HTML, not as a normal URL parameter</a:t>
             </a:r>
           </a:p>
           <a:p>
@@ -8874,22 +10544,7 @@
               </a:defRPr>
             </a:pPr>
             <a:r>
-              <a:t>utm_medium | Identifies the marketing channel | Highest-priority channel classification input</a:t>
-            </a:r>
-          </a:p>
-          <a:p>
-            <a:pPr>
-              <a:spcAft>
-                <a:spcPts val="300"/>
-              </a:spcAft>
-              <a:defRPr sz="1300">
-                <a:solidFill>
-                  <a:srgbClr val="5C7080"/>
-                </a:solidFill>
-              </a:defRPr>
-            </a:pPr>
-            <a:r>
-              <a:t>utm_source | Identifies vendor or platform within the channel | Must come from approved mappings</a:t>
+              <a:t>Event ID / EID | Event or integrated activity context | Use for event integrations, static data, manual uploads, and relevant non-URL sources</a:t>
             </a:r>
           </a:p>
         </p:txBody>
@@ -8943,7 +10598,7 @@
               </a:defRPr>
             </a:pPr>
             <a:r>
-              <a:t>Facilitator note: Reinforce that ccid and utm_id are the same identifier passed in two ways in the current state.</a:t>
+              <a:t>Facilitator note: The old CTT deck states IDs are captured for all marketing sources, not just digital. That means CTT continues to support offline, static, manual-upload, event, and integration scenarios where UTMs alone are insufficient.</a:t>
             </a:r>
           </a:p>
         </p:txBody>
@@ -9082,7 +10737,7 @@
               </a:defRPr>
             </a:pPr>
             <a:r>
-              <a:t>When to use Campaign Tagging and Tracking IDs</a:t>
+              <a:t>How UTM values will be used</a:t>
             </a:r>
           </a:p>
         </p:txBody>
@@ -9113,119 +10768,89 @@
               <a:spcAft>
                 <a:spcPts val="300"/>
               </a:spcAft>
-              <a:defRPr sz="1500" b="1">
-                <a:solidFill>
-                  <a:srgbClr val="005596"/>
-                </a:solidFill>
-              </a:defRPr>
-            </a:pPr>
-            <a:r>
-              <a:t>Use ccid and dtid for:</a:t>
-            </a:r>
-          </a:p>
-          <a:p>
-            <a:pPr>
-              <a:spcAft>
-                <a:spcPts val="300"/>
-              </a:spcAft>
-              <a:defRPr sz="1500">
-                <a:solidFill>
-                  <a:srgbClr val="1F2937"/>
-                </a:solidFill>
-              </a:defRPr>
-            </a:pPr>
-            <a:r>
-              <a:t>All activations in the current hybrid state</a:t>
-            </a:r>
-          </a:p>
-          <a:p>
-            <a:pPr>
-              <a:spcAft>
-                <a:spcPts val="300"/>
-              </a:spcAft>
-              <a:defRPr sz="1500">
-                <a:solidFill>
-                  <a:srgbClr val="1F2937"/>
-                </a:solidFill>
-              </a:defRPr>
-            </a:pPr>
-            <a:r>
-              <a:t>Reporting that still depends on legacy campaign and channel identifiers</a:t>
-            </a:r>
-          </a:p>
-          <a:p>
-            <a:pPr>
-              <a:spcAft>
-                <a:spcPts val="300"/>
-              </a:spcAft>
-              <a:defRPr sz="1500">
-                <a:solidFill>
-                  <a:srgbClr val="1F2937"/>
-                </a:solidFill>
-              </a:defRPr>
-            </a:pPr>
-            <a:r>
-              <a:t>Maintaining continuity while Workfront Channel IDs and UTM-based attribution mature</a:t>
-            </a:r>
-          </a:p>
-          <a:p>
-            <a:pPr>
-              <a:spcAft>
-                <a:spcPts val="300"/>
-              </a:spcAft>
-              <a:defRPr sz="1500" b="1">
-                <a:solidFill>
-                  <a:srgbClr val="005596"/>
-                </a:solidFill>
-              </a:defRPr>
-            </a:pPr>
-            <a:r>
-              <a:t>Do not:</a:t>
-            </a:r>
-          </a:p>
-          <a:p>
-            <a:pPr>
-              <a:spcAft>
-                <a:spcPts val="300"/>
-              </a:spcAft>
-              <a:defRPr sz="1500">
-                <a:solidFill>
-                  <a:srgbClr val="1F2937"/>
-                </a:solidFill>
-              </a:defRPr>
-            </a:pPr>
-            <a:r>
-              <a:t>Drop ccid or dtid before future-state guidance says they are retired</a:t>
-            </a:r>
-          </a:p>
-          <a:p>
-            <a:pPr>
-              <a:spcAft>
-                <a:spcPts val="300"/>
-              </a:spcAft>
-              <a:defRPr sz="1500">
-                <a:solidFill>
-                  <a:srgbClr val="1F2937"/>
-                </a:solidFill>
-              </a:defRPr>
-            </a:pPr>
-            <a:r>
-              <a:t>Create new ID formats outside the approved standard</a:t>
-            </a:r>
-          </a:p>
-          <a:p>
-            <a:pPr>
-              <a:spcAft>
-                <a:spcPts val="300"/>
-              </a:spcAft>
-              <a:defRPr sz="1500">
-                <a:solidFill>
-                  <a:srgbClr val="1F2937"/>
-                </a:solidFill>
-              </a:defRPr>
-            </a:pPr>
-            <a:r>
-              <a:t>Let utm_id differ from ccid</a:t>
+              <a:defRPr sz="1300">
+                <a:solidFill>
+                  <a:srgbClr val="5C7080"/>
+                </a:solidFill>
+              </a:defRPr>
+            </a:pPr>
+            <a:r>
+              <a:t>UTM value | Future usage | Cisco alignment from source decks</a:t>
+            </a:r>
+          </a:p>
+          <a:p>
+            <a:pPr>
+              <a:spcAft>
+                <a:spcPts val="300"/>
+              </a:spcAft>
+              <a:defRPr sz="1300">
+                <a:solidFill>
+                  <a:srgbClr val="5C7080"/>
+                </a:solidFill>
+              </a:defRPr>
+            </a:pPr>
+            <a:r>
+              <a:t>utm_id | Universal ID carrying reporting attributes | Activity ID today; future Workfront Channel ID when available</a:t>
+            </a:r>
+          </a:p>
+          <a:p>
+            <a:pPr>
+              <a:spcAft>
+                <a:spcPts val="300"/>
+              </a:spcAft>
+              <a:defRPr sz="1300">
+                <a:solidFill>
+                  <a:srgbClr val="5C7080"/>
+                </a:solidFill>
+              </a:defRPr>
+            </a:pPr>
+            <a:r>
+              <a:t>utm_medium | Marketing method or channel | Vehicle / channel classification</a:t>
+            </a:r>
+          </a:p>
+          <a:p>
+            <a:pPr>
+              <a:spcAft>
+                <a:spcPts val="300"/>
+              </a:spcAft>
+              <a:defRPr sz="1300">
+                <a:solidFill>
+                  <a:srgbClr val="5C7080"/>
+                </a:solidFill>
+              </a:defRPr>
+            </a:pPr>
+            <a:r>
+              <a:t>utm_source | Platform, website, vendor, or source | Sub-vehicle / vendor classification</a:t>
+            </a:r>
+          </a:p>
+          <a:p>
+            <a:pPr>
+              <a:spcAft>
+                <a:spcPts val="300"/>
+              </a:spcAft>
+              <a:defRPr sz="1300">
+                <a:solidFill>
+                  <a:srgbClr val="5C7080"/>
+                </a:solidFill>
+              </a:defRPr>
+            </a:pPr>
+            <a:r>
+              <a:t>utm_campaign | Campaign or promotion grouping | Future campaign-level strategy; not required today</a:t>
+            </a:r>
+          </a:p>
+          <a:p>
+            <a:pPr>
+              <a:spcAft>
+                <a:spcPts val="300"/>
+              </a:spcAft>
+              <a:defRPr sz="1300">
+                <a:solidFill>
+                  <a:srgbClr val="5C7080"/>
+                </a:solidFill>
+              </a:defRPr>
+            </a:pPr>
+            <a:r>
+              <a:t>utm_creative | Creative or placement-level detail | Paid creative attribution where required</a:t>
             </a:r>
           </a:p>
         </p:txBody>
@@ -9279,7 +10904,7 @@
               </a:defRPr>
             </a:pPr>
             <a:r>
-              <a:t>Facilitator note: ccid must start with cc and be 8 characters long, for example cc008317.</a:t>
+              <a:t>Facilitator note: The UTM overview deck describes the goal as automated Universal IDs and UTM codes, standard Adobe reporting, Ace reporting alignment, and one standard tool to create and manage IDs and UTM values.</a:t>
             </a:r>
           </a:p>
         </p:txBody>
@@ -9418,7 +11043,7 @@
               </a:defRPr>
             </a:pPr>
             <a:r>
-              <a:t>When to use UTM parameters</a:t>
+              <a:t>Future URL direction</a:t>
             </a:r>
           </a:p>
         </p:txBody>
@@ -9456,7 +11081,23 @@
               </a:defRPr>
             </a:pPr>
             <a:r>
-              <a:t>Use UTMs whenever an activation drives traffic to a Cisco central marketing-owned property.</a:t>
+              <a:t>Current hybrid URL:</a:t>
+            </a:r>
+          </a:p>
+          <a:p>
+            <a:pPr>
+              <a:spcAft>
+                <a:spcPts val="300"/>
+              </a:spcAft>
+              <a:defRPr sz="1100">
+                <a:solidFill>
+                  <a:srgbClr val="008060"/>
+                </a:solidFill>
+                <a:latin typeface="Courier New"/>
+              </a:defRPr>
+            </a:pPr>
+            <a:r>
+              <a:t>URL?ccid=[ccid]&amp;dtid=[dtid]&amp;utm_id=[ccid]&amp;utm_medium=[medium]&amp;utm_source=[source]</a:t>
             </a:r>
           </a:p>
           <a:p>
@@ -9471,7 +11112,38 @@
               </a:defRPr>
             </a:pPr>
             <a:r>
-              <a:t>Required today:</a:t>
+              <a:t>Future direction after Workfront Channel IDs are available:</a:t>
+            </a:r>
+          </a:p>
+          <a:p>
+            <a:pPr>
+              <a:spcAft>
+                <a:spcPts val="300"/>
+              </a:spcAft>
+              <a:defRPr sz="1100">
+                <a:solidFill>
+                  <a:srgbClr val="008060"/>
+                </a:solidFill>
+                <a:latin typeface="Courier New"/>
+              </a:defRPr>
+            </a:pPr>
+            <a:r>
+              <a:t>URL?utm_id=[workfront-channel-id]&amp;utm_medium=[medium]&amp;utm_source=[source]</a:t>
+            </a:r>
+          </a:p>
+          <a:p>
+            <a:pPr>
+              <a:spcAft>
+                <a:spcPts val="300"/>
+              </a:spcAft>
+              <a:defRPr sz="1500" b="1">
+                <a:solidFill>
+                  <a:srgbClr val="005596"/>
+                </a:solidFill>
+              </a:defRPr>
+            </a:pPr>
+            <a:r>
+              <a:t>Still conditional:</a:t>
             </a:r>
           </a:p>
           <a:p>
@@ -9486,7 +11158,7 @@
               </a:defRPr>
             </a:pPr>
             <a:r>
-              <a:t>utm_id: campaign/activation identifier; equals ccid today</a:t>
+              <a:t>Add utm_creative=%ecid! only for channels that require creative-level attribution.</a:t>
             </a:r>
           </a:p>
           <a:p>
@@ -9501,7 +11173,7 @@
               </a:defRPr>
             </a:pPr>
             <a:r>
-              <a:t>utm_medium: channel classification</a:t>
+              <a:t>Add utm_campaign only after the organization-wide campaign strategy is defined.</a:t>
             </a:r>
           </a:p>
           <a:p>
@@ -9516,67 +11188,7 @@
               </a:defRPr>
             </a:pPr>
             <a:r>
-              <a:t>utm_source: platform/vendor classification</a:t>
-            </a:r>
-          </a:p>
-          <a:p>
-            <a:pPr>
-              <a:spcAft>
-                <a:spcPts val="300"/>
-              </a:spcAft>
-              <a:defRPr sz="1500" b="1">
-                <a:solidFill>
-                  <a:srgbClr val="005596"/>
-                </a:solidFill>
-              </a:defRPr>
-            </a:pPr>
-            <a:r>
-              <a:t>Conditional:</a:t>
-            </a:r>
-          </a:p>
-          <a:p>
-            <a:pPr>
-              <a:spcAft>
-                <a:spcPts val="300"/>
-              </a:spcAft>
-              <a:defRPr sz="1500">
-                <a:solidFill>
-                  <a:srgbClr val="1F2937"/>
-                </a:solidFill>
-              </a:defRPr>
-            </a:pPr>
-            <a:r>
-              <a:t>utm_creative=%ecid!: only for Paid Direct, Paid Programmatic, and Paid Social</a:t>
-            </a:r>
-          </a:p>
-          <a:p>
-            <a:pPr>
-              <a:spcAft>
-                <a:spcPts val="300"/>
-              </a:spcAft>
-              <a:defRPr sz="1500" b="1">
-                <a:solidFill>
-                  <a:srgbClr val="005596"/>
-                </a:solidFill>
-              </a:defRPr>
-            </a:pPr>
-            <a:r>
-              <a:t>Reserved:</a:t>
-            </a:r>
-          </a:p>
-          <a:p>
-            <a:pPr>
-              <a:spcAft>
-                <a:spcPts val="300"/>
-              </a:spcAft>
-              <a:defRPr sz="1500">
-                <a:solidFill>
-                  <a:srgbClr val="1F2937"/>
-                </a:solidFill>
-              </a:defRPr>
-            </a:pPr>
-            <a:r>
-              <a:t>utm_campaign: future use; omit today unless the standard changes</a:t>
+              <a:t>Keep CTT values in the correct system or placement when they still power lead, nurture, offer, event, or static-data use cases.</a:t>
             </a:r>
           </a:p>
         </p:txBody>
@@ -9630,7 +11242,7 @@
               </a:defRPr>
             </a:pPr>
             <a:r>
-              <a:t>Facilitator note: UTMs can be created via Workfront, Stensul, and Manual URL Builder, but the same value rules apply.</a:t>
+              <a:t>Facilitator note: Repository source says future Workfront Channel IDs will replace the ccid value in utm_id, dtid will be replaced by utm_source and utm_medium, and both dtid and ccid can be removed at that time.</a:t>
             </a:r>
           </a:p>
         </p:txBody>
@@ -9769,7 +11381,7 @@
               </a:defRPr>
             </a:pPr>
             <a:r>
-              <a:t>Use the right build path</a:t>
+              <a:t>What users should do differently in the future</a:t>
             </a:r>
           </a:p>
         </p:txBody>
@@ -9800,74 +11412,149 @@
               <a:spcAft>
                 <a:spcPts val="300"/>
               </a:spcAft>
-              <a:defRPr sz="1300">
-                <a:solidFill>
-                  <a:srgbClr val="5C7080"/>
-                </a:solidFill>
-              </a:defRPr>
-            </a:pPr>
-            <a:r>
-              <a:t>Situation | Recommended path | Why</a:t>
-            </a:r>
-          </a:p>
-          <a:p>
-            <a:pPr>
-              <a:spcAft>
-                <a:spcPts val="300"/>
-              </a:spcAft>
-              <a:defRPr sz="1300">
-                <a:solidFill>
-                  <a:srgbClr val="5C7080"/>
-                </a:solidFill>
-              </a:defRPr>
-            </a:pPr>
-            <a:r>
-              <a:t>Workfront channel activation | Workfront-generated URL | Centralized intake and mapping source of truth</a:t>
-            </a:r>
-          </a:p>
-          <a:p>
-            <a:pPr>
-              <a:spcAft>
-                <a:spcPts val="300"/>
-              </a:spcAft>
-              <a:defRPr sz="1300">
-                <a:solidFill>
-                  <a:srgbClr val="5C7080"/>
-                </a:solidFill>
-              </a:defRPr>
-            </a:pPr>
-            <a:r>
-              <a:t>Email or other supported non-Workfront flow | Stensul when applicable | Same UTM rules, managed by the owning team</a:t>
-            </a:r>
-          </a:p>
-          <a:p>
-            <a:pPr>
-              <a:spcAft>
-                <a:spcPts val="300"/>
-              </a:spcAft>
-              <a:defRPr sz="1300">
-                <a:solidFill>
-                  <a:srgbClr val="5C7080"/>
-                </a:solidFill>
-              </a:defRPr>
-            </a:pPr>
-            <a:r>
-              <a:t>External web referral or exception | Manual URL Builder | web-referral is manual-build only today</a:t>
-            </a:r>
-          </a:p>
-          <a:p>
-            <a:pPr>
-              <a:spcAft>
-                <a:spcPts val="300"/>
-              </a:spcAft>
-              <a:defRPr sz="1300">
-                <a:solidFill>
-                  <a:srgbClr val="5C7080"/>
-                </a:solidFill>
-              </a:defRPr>
-            </a:pPr>
-            <a:r>
-              <a:t>Missing source/medium option | Escalate for mapping update | Avoid creating unapproved values</a:t>
+              <a:defRPr sz="1500" b="1">
+                <a:solidFill>
+                  <a:srgbClr val="005596"/>
+                </a:solidFill>
+              </a:defRPr>
+            </a:pPr>
+            <a:r>
+              <a:t>Do:</a:t>
+            </a:r>
+          </a:p>
+          <a:p>
+            <a:pPr>
+              <a:spcAft>
+                <a:spcPts val="300"/>
+              </a:spcAft>
+              <a:defRPr sz="1500">
+                <a:solidFill>
+                  <a:srgbClr val="1F2937"/>
+                </a:solidFill>
+              </a:defRPr>
+            </a:pPr>
+            <a:r>
+              <a:t>Let Workfront or the approved builder generate UTM values whenever possible.</a:t>
+            </a:r>
+          </a:p>
+          <a:p>
+            <a:pPr>
+              <a:spcAft>
+                <a:spcPts val="300"/>
+              </a:spcAft>
+              <a:defRPr sz="1500">
+                <a:solidFill>
+                  <a:srgbClr val="1F2937"/>
+                </a:solidFill>
+              </a:defRPr>
+            </a:pPr>
+            <a:r>
+              <a:t>Use CTT IDs for campaign, drive-to, offer, event, static-data, and lead-flow context.</a:t>
+            </a:r>
+          </a:p>
+          <a:p>
+            <a:pPr>
+              <a:spcAft>
+                <a:spcPts val="300"/>
+              </a:spcAft>
+              <a:defRPr sz="1500">
+                <a:solidFill>
+                  <a:srgbClr val="1F2937"/>
+                </a:solidFill>
+              </a:defRPr>
+            </a:pPr>
+            <a:r>
+              <a:t>Use UTMs for digital traffic attribution and channel/source optimization.</a:t>
+            </a:r>
+          </a:p>
+          <a:p>
+            <a:pPr>
+              <a:spcAft>
+                <a:spcPts val="300"/>
+              </a:spcAft>
+              <a:defRPr sz="1500">
+                <a:solidFill>
+                  <a:srgbClr val="1F2937"/>
+                </a:solidFill>
+              </a:defRPr>
+            </a:pPr>
+            <a:r>
+              <a:t>Escalate when a required source, medium, or CTT value does not exist.</a:t>
+            </a:r>
+          </a:p>
+          <a:p>
+            <a:pPr>
+              <a:spcAft>
+                <a:spcPts val="300"/>
+              </a:spcAft>
+              <a:defRPr sz="1500" b="1">
+                <a:solidFill>
+                  <a:srgbClr val="005596"/>
+                </a:solidFill>
+              </a:defRPr>
+            </a:pPr>
+            <a:r>
+              <a:t>Do not:</a:t>
+            </a:r>
+          </a:p>
+          <a:p>
+            <a:pPr>
+              <a:spcAft>
+                <a:spcPts val="300"/>
+              </a:spcAft>
+              <a:defRPr sz="1500">
+                <a:solidFill>
+                  <a:srgbClr val="1F2937"/>
+                </a:solidFill>
+              </a:defRPr>
+            </a:pPr>
+            <a:r>
+              <a:t>Add CTT IDs to internal Cisco.com URLs or internal CTAs.</a:t>
+            </a:r>
+          </a:p>
+          <a:p>
+            <a:pPr>
+              <a:spcAft>
+                <a:spcPts val="300"/>
+              </a:spcAft>
+              <a:defRPr sz="1500">
+                <a:solidFill>
+                  <a:srgbClr val="1F2937"/>
+                </a:solidFill>
+              </a:defRPr>
+            </a:pPr>
+            <a:r>
+              <a:t>Put Offer IDs into ordinary URL parameters when the offer should be tagged in page HTML.</a:t>
+            </a:r>
+          </a:p>
+          <a:p>
+            <a:pPr>
+              <a:spcAft>
+                <a:spcPts val="300"/>
+              </a:spcAft>
+              <a:defRPr sz="1500">
+                <a:solidFill>
+                  <a:srgbClr val="1F2937"/>
+                </a:solidFill>
+              </a:defRPr>
+            </a:pPr>
+            <a:r>
+              <a:t>Create local utm_medium or utm_source variants.</a:t>
+            </a:r>
+          </a:p>
+          <a:p>
+            <a:pPr>
+              <a:spcAft>
+                <a:spcPts val="300"/>
+              </a:spcAft>
+              <a:defRPr sz="1500">
+                <a:solidFill>
+                  <a:srgbClr val="1F2937"/>
+                </a:solidFill>
+              </a:defRPr>
+            </a:pPr>
+            <a:r>
+              <a:t>Assume UTMs replace every CTT use case; CTT still supports non-digital and lead-context scenarios.</a:t>
             </a:r>
           </a:p>
         </p:txBody>
@@ -9921,7 +11608,7 @@
               </a:defRPr>
             </a:pPr>
             <a:r>
-              <a:t>Facilitator note: Source says Workfront execution source of truth is Source and Mediums.xlsx. If source documents differ, Source and Mediums.xlsx wins.</a:t>
+              <a:t>Facilitator note: This combines the CTT key takeaways with the UTM transition logic: UTMs improve standardized digital attribution, while CTT values still preserve campaign, offer, event, and lead-generation context.</a:t>
             </a:r>
           </a:p>
         </p:txBody>
